--- a/slides/Cursor_CaseStudy_FairA.pptx
+++ b/slides/Cursor_CaseStudy_FairA.pptx
@@ -4,6 +4,9 @@
   <p:sldMasterIdLst>
     <p:sldMasterId id="2147483648" r:id="rId1"/>
   </p:sldMasterIdLst>
+  <p:notesMasterIdLst>
+    <p:notesMasterId r:id="rId10"/>
+  </p:notesMasterIdLst>
   <p:sldIdLst>
     <p:sldId id="256" r:id="rId2"/>
     <p:sldId id="257" r:id="rId3"/>
@@ -14,9 +17,6 @@
     <p:sldId id="262" r:id="rId8"/>
     <p:sldId id="263" r:id="rId9"/>
   </p:sldIdLst>
-  <p:notesMasterIdLst>
-    <p:notesMasterId r:id="rId10"/>
-  </p:notesMasterIdLst>
   <p:sldSz cx="12192000" cy="6858000"/>
   <p:notesSz cx="6858000" cy="12192000"/>
   <p:defaultTextStyle>
@@ -114,25 +114,25 @@
   <p:extLst>
     <p:ext uri="{521415D9-36F7-43E2-AB2F-B90AF26B5E84}">
       <p14:sectionLst xmlns:p14="http://schemas.microsoft.com/office/powerpoint/2010/main">
-        <p14:section name="The system and the thesis" id="{4e0dbcf8-72ca-0946-8ab8-e8f3fff0c0f9}">
+        <p14:section name="The system and the thesis" id="{4E0DBCF8-72CA-0946-8AB8-E8F3FFF0C0F9}">
           <p14:sldIdLst>
             <p14:sldId id="256"/>
             <p14:sldId id="257"/>
           </p14:sldIdLst>
         </p14:section>
-        <p14:section name="Box by box" id="{a49d8017-8406-e473-abfe-73d003628d78}">
+        <p14:section name="Box by box" id="{A49D8017-8406-E473-ABFE-73D003628D78}">
           <p14:sldIdLst>
             <p14:sldId id="258"/>
             <p14:sldId id="259"/>
             <p14:sldId id="260"/>
           </p14:sldIdLst>
         </p14:section>
-        <p14:section name="Seams and cost" id="{46372528-7f9d-cacf-ac18-093a03fb18aa}">
+        <p14:section name="Seams and cost" id="{46372528-7F9D-CACF-AC18-093A03FB18AA}">
           <p14:sldIdLst>
             <p14:sldId id="261"/>
           </p14:sldIdLst>
         </p14:section>
-        <p14:section name="Measurements and verdict" id="{30eec249-5ae5-60ee-e0e5-59af30752ccb}">
+        <p14:section name="Measurements and verdict" id="{30EEC249-5AE5-60EE-E0E5-59AF30752CCB}">
           <p14:sldIdLst>
             <p14:sldId id="262"/>
             <p14:sldId id="263"/>
@@ -169,234 +169,10 @@
           <a:chExt cx="0" cy="0"/>
         </a:xfrm>
       </p:grpSpPr>
-      <p:sp>
-        <p:nvSpPr>
-          <p:cNvPr id="2" name="Header Placeholder 1"/>
-          <p:cNvSpPr>
-            <a:spLocks noGrp="1"/>
-          </p:cNvSpPr>
-          <p:nvPr>
-            <p:ph type="hdr" sz="quarter"/>
-          </p:nvPr>
-        </p:nvSpPr>
-        <p:spPr>
-          <a:xfrm>
-            <a:off x="0" y="0"/>
-            <a:ext cx="2971800" cy="458788"/>
-          </a:xfrm>
-          <a:prstGeom prst="rect">
-            <a:avLst/>
-          </a:prstGeom>
-        </p:spPr>
-        <p:txBody>
-          <a:bodyPr vert="horz" lIns="91440" tIns="45720" rIns="91440" bIns="45720" rtlCol="0"/>
-          <a:lstStyle>
-            <a:lvl1pPr algn="l">
-              <a:defRPr sz="1200"/>
-            </a:lvl1pPr>
-          </a:lstStyle>
-          <a:p>
-            <a:endParaRPr lang="en-US"/>
-          </a:p>
-        </p:txBody>
-      </p:sp>
-      <p:sp>
-        <p:nvSpPr>
-          <p:cNvPr id="3" name="Date Placeholder 2"/>
-          <p:cNvSpPr>
-            <a:spLocks noGrp="1"/>
-          </p:cNvSpPr>
-          <p:nvPr>
-            <p:ph type="dt" idx="1"/>
-          </p:nvPr>
-        </p:nvSpPr>
-        <p:spPr>
-          <a:xfrm>
-            <a:off x="3884613" y="0"/>
-            <a:ext cx="2971800" cy="458788"/>
-          </a:xfrm>
-          <a:prstGeom prst="rect">
-            <a:avLst/>
-          </a:prstGeom>
-        </p:spPr>
-        <p:txBody>
-          <a:bodyPr vert="horz" lIns="91440" tIns="45720" rIns="91440" bIns="45720" rtlCol="0"/>
-          <a:lstStyle>
-            <a:lvl1pPr algn="r">
-              <a:defRPr sz="1200"/>
-            </a:lvl1pPr>
-          </a:lstStyle>
-          <a:p>
-            <a:fld id="{5282F153-3F37-0F45-9E97-73ACFA13230C}" type="datetimeFigureOut">
-              <a:rPr lang="en-US"/>
-              <a:t>7/23/19</a:t>
-            </a:fld>
-            <a:endParaRPr lang="en-US"/>
-          </a:p>
-        </p:txBody>
-      </p:sp>
-      <p:sp>
-        <p:nvSpPr>
-          <p:cNvPr id="4" name="Slide Image Placeholder 3"/>
-          <p:cNvSpPr>
-            <a:spLocks noGrp="1" noRot="1" noChangeAspect="1"/>
-          </p:cNvSpPr>
-          <p:nvPr>
-            <p:ph type="sldImg" idx="2"/>
-          </p:nvPr>
-        </p:nvSpPr>
-        <p:spPr>
-          <a:xfrm>
-            <a:off x="685800" y="1143000"/>
-            <a:ext cx="5486400" cy="3086100"/>
-          </a:xfrm>
-          <a:prstGeom prst="rect">
-            <a:avLst/>
-          </a:prstGeom>
-          <a:noFill/>
-          <a:ln w="12700">
-            <a:solidFill>
-              <a:prstClr val="black"/>
-            </a:solidFill>
-          </a:ln>
-        </p:spPr>
-        <p:txBody>
-          <a:bodyPr vert="horz" lIns="91440" tIns="45720" rIns="91440" bIns="45720" rtlCol="0" anchor="ctr"/>
-          <a:lstStyle/>
-          <a:p>
-            <a:endParaRPr lang="en-US"/>
-          </a:p>
-        </p:txBody>
-      </p:sp>
-      <p:sp>
-        <p:nvSpPr>
-          <p:cNvPr id="5" name="Notes Placeholder 4"/>
-          <p:cNvSpPr>
-            <a:spLocks noGrp="1"/>
-          </p:cNvSpPr>
-          <p:nvPr>
-            <p:ph type="body" sz="quarter" idx="3"/>
-          </p:nvPr>
-        </p:nvSpPr>
-        <p:spPr>
-          <a:xfrm>
-            <a:off x="685800" y="4400550"/>
-            <a:ext cx="5486400" cy="3600450"/>
-          </a:xfrm>
-          <a:prstGeom prst="rect">
-            <a:avLst/>
-          </a:prstGeom>
-        </p:spPr>
-        <p:txBody>
-          <a:bodyPr vert="horz" lIns="91440" tIns="45720" rIns="91440" bIns="45720" rtlCol="0"/>
-          <a:lstStyle/>
-          <a:p>
-            <a:pPr lvl="0"/>
-            <a:r>
-              <a:rPr lang="en-US"/>
-              <a:t>Click to edit Master text styles</a:t>
-            </a:r>
-          </a:p>
-          <a:p>
-            <a:pPr lvl="1"/>
-            <a:r>
-              <a:rPr lang="en-US"/>
-              <a:t>Second level</a:t>
-            </a:r>
-          </a:p>
-          <a:p>
-            <a:pPr lvl="2"/>
-            <a:r>
-              <a:rPr lang="en-US"/>
-              <a:t>Third level</a:t>
-            </a:r>
-          </a:p>
-          <a:p>
-            <a:pPr lvl="3"/>
-            <a:r>
-              <a:rPr lang="en-US"/>
-              <a:t>Fourth level</a:t>
-            </a:r>
-          </a:p>
-          <a:p>
-            <a:pPr lvl="4"/>
-            <a:r>
-              <a:rPr lang="en-US"/>
-              <a:t>Fifth level</a:t>
-            </a:r>
-          </a:p>
-        </p:txBody>
-      </p:sp>
-      <p:sp>
-        <p:nvSpPr>
-          <p:cNvPr id="6" name="Footer Placeholder 5"/>
-          <p:cNvSpPr>
-            <a:spLocks noGrp="1"/>
-          </p:cNvSpPr>
-          <p:nvPr>
-            <p:ph type="ftr" sz="quarter" idx="4"/>
-          </p:nvPr>
-        </p:nvSpPr>
-        <p:spPr>
-          <a:xfrm>
-            <a:off x="0" y="8685213"/>
-            <a:ext cx="2971800" cy="458787"/>
-          </a:xfrm>
-          <a:prstGeom prst="rect">
-            <a:avLst/>
-          </a:prstGeom>
-        </p:spPr>
-        <p:txBody>
-          <a:bodyPr vert="horz" lIns="91440" tIns="45720" rIns="91440" bIns="45720" rtlCol="0" anchor="b"/>
-          <a:lstStyle>
-            <a:lvl1pPr algn="l">
-              <a:defRPr sz="1200"/>
-            </a:lvl1pPr>
-          </a:lstStyle>
-          <a:p>
-            <a:endParaRPr lang="en-US"/>
-          </a:p>
-        </p:txBody>
-      </p:sp>
-      <p:sp>
-        <p:nvSpPr>
-          <p:cNvPr id="7" name="Slide Number Placeholder 6"/>
-          <p:cNvSpPr>
-            <a:spLocks noGrp="1"/>
-          </p:cNvSpPr>
-          <p:nvPr>
-            <p:ph type="sldNum" sz="quarter" idx="5"/>
-          </p:nvPr>
-        </p:nvSpPr>
-        <p:spPr>
-          <a:xfrm>
-            <a:off x="3884613" y="8685213"/>
-            <a:ext cx="2971800" cy="458787"/>
-          </a:xfrm>
-          <a:prstGeom prst="rect">
-            <a:avLst/>
-          </a:prstGeom>
-        </p:spPr>
-        <p:txBody>
-          <a:bodyPr vert="horz" lIns="91440" tIns="45720" rIns="91440" bIns="45720" rtlCol="0" anchor="b"/>
-          <a:lstStyle>
-            <a:lvl1pPr algn="r">
-              <a:defRPr sz="1200"/>
-            </a:lvl1pPr>
-          </a:lstStyle>
-          <a:p>
-            <a:fld id="{CE5E9CC1-C706-0F49-92D6-E571CC5EEA8F}" type="slidenum">
-              <a:rPr lang="en-US"/>
-              <a:t>‹#›</a:t>
-            </a:fld>
-            <a:endParaRPr lang="en-US"/>
-          </a:p>
-        </p:txBody>
-      </p:sp>
     </p:spTree>
     <p:extLst>
       <p:ext uri="{BB962C8B-B14F-4D97-AF65-F5344CB8AC3E}">
-        <p14:creationId xmlns:p14="http://schemas.microsoft.com/office/powerpoint/2010/main" val="1024086991"/>
+        <p14:creationId xmlns:p14="http://schemas.microsoft.com/office/powerpoint/2010/main" val="3491030668"/>
       </p:ext>
     </p:extLst>
   </p:cSld>
@@ -544,7 +320,6 @@
               <a:rPr lang="en-US" dirty="0"/>
               <a:t>[Greyson] Opener, about 30 seconds. Name the system and the standing question: which boxes of the classical decomposition are explicit in Cursor, which went latent inside a model, and which are missing. Then go to the map.</a:t>
             </a:r>
-            <a:endParaRPr lang="en-US" dirty="0"/>
           </a:p>
         </p:txBody>
       </p:sp>
@@ -632,7 +407,6 @@
               <a:rPr lang="en-US" dirty="0"/>
               <a:t>[Greyson] About 1 minute. Thesis from the brief: Cursor rents understanding and generation from other labs' models, but builds an explicit, heavily engineered belief state around them, and is pulling policy in-house by training its own models inside its own harness. The moat is the harness, not the model. Walk the table top to bottom, then go straight into the context slide.</a:t>
             </a:r>
-            <a:endParaRPr lang="en-US" dirty="0"/>
           </a:p>
         </p:txBody>
       </p:sp>
@@ -720,7 +494,6 @@
               <a:rPr lang="en-US" dirty="0"/>
               <a:t>[Greyson] About 2 minutes. Left box: what Cursor always puts in the window, which shrank over time to the system prompt and tools, OS, git status and current files [3]. Right box: everything else the agent fetches while it works, mostly through files: long tool output written to a file it can tail, the chat history file it can search after a summary drops details, terminal sessions synced to files, and MCP tool details loaded only when needed [2]. Understanding is both explicit and latent: Cursor trained its own embedding model on agent sessions, and semantic search plus grep grounds the request in code before the model reasons over it [1]. State is explicit plumbing plus a latent choice: the model decides what to pull in. That is belief-state construction (L13, L14) done with files. Hand to Michael.</a:t>
             </a:r>
-            <a:endParaRPr lang="en-US" dirty="0"/>
           </a:p>
         </p:txBody>
       </p:sp>
@@ -808,7 +581,6 @@
               <a:rPr lang="en-US" dirty="0"/>
               <a:t>[Michael] About 1 minute 20. In L3 the policy chooses ask, confirm or act. In Cursor the act is a tool call, and the model makes that choice, so the policy is latent. But Cursor works on that policy at three levels. Tab is the cleanest example: a two-action policy, accept +0.75, reject −0.25, silence 0. That is the L3 reward written down, and it learned to suggest 21% less with a 28% higher accept rate. Composer is Cursor training the policy inside its own harness, on the same tools you use. Composer 2 even learns to write its own summaries, so belief-state management becomes part of the policy; compaction error dropped 50%. For models Cursor rents, it uses controls instead: plan mode is a confirm-before-act switch, and Router is a learned policy that picks which model’s policy runs, about 60% savings at frontier quality in Cursor’s A/B tests. The catch: every one of these rewards is a proxy; none sees the user’s actual goal.</a:t>
             </a:r>
-            <a:endParaRPr lang="en-US" dirty="0"/>
           </a:p>
         </p:txBody>
       </p:sp>
@@ -896,7 +668,6 @@
               <a:rPr lang="en-US" dirty="0"/>
               <a:t>[Michael] About 1 minute 10. Point at the exhibit: here is one real run of our shared task. Policy turns are where it chose to search, to run tools in parallel, or to stop. Then the interfaces box: each vendor gets its own edit format, because each model was trained on its own and the unfamiliar one costs extra reasoning tokens and more mistakes. Tool errors come back typed, which is the closest thing in Cursor to L3’s observation back to the policy. The seam: switching models mid-chat puts a model on history it would never have written and breaks the prompt cache, so Cursor’s own advice is one model per chat. Hand off to Heeba on economics.</a:t>
             </a:r>
-            <a:endParaRPr lang="en-US" dirty="0"/>
           </a:p>
         </p:txBody>
       </p:sp>
@@ -984,7 +755,6 @@
               <a:rPr lang="en-US" dirty="0"/>
               <a:t>[Heeba] About 2 minutes. Sam (Apr 2025): no layer checked generation against real policy. Pricing (Jun to Jul 2025): hard requests cost about 10x simple ones, so Pro moved to $20 of usage at API rates. Composer 2 (Mar 2026): base found via an intercepted model ID; about a quarter of compute from the base, three quarters Cursor’s own training. The last column is the $20 Pro allowance divided by the cost of one run of our task on each model, from our runs. Hand to Canting.</a:t>
             </a:r>
-            <a:endParaRPr lang="en-US" dirty="0"/>
           </a:p>
         </p:txBody>
       </p:sp>
@@ -1072,7 +842,6 @@
               <a:rPr lang="en-US" dirty="0"/>
               <a:t>[Canting] About 2 minutes. Same fixed task across three frontier models plus Composer 2, logging tokens, latency, tool calls and how many of the 9 hidden tests the diff passes (our own Keep Rate). Call out the one result that most supports or breaks the thesis. Hand to the verdict.</a:t>
             </a:r>
-            <a:endParaRPr lang="en-US" dirty="0"/>
           </a:p>
         </p:txBody>
       </p:sp>
@@ -1160,7 +929,6 @@
               <a:rPr lang="en-US" dirty="0"/>
               <a:t>[Canting] About 1 minute. The verdict: Cursor shows where the field is going for apps built on someone else’s model. Understanding and generation stay rented and latent; the product is the belief state and the interfaces around them, and the policy is being pulled in-house. The seams show wherever the harness stops: outside the repo, and at the boundary between vendors. Then open for questions.</a:t>
             </a:r>
-            <a:endParaRPr lang="en-US" dirty="0"/>
           </a:p>
         </p:txBody>
       </p:sp>
@@ -1238,6 +1006,7 @@
         <a:solidFill>
           <a:srgbClr val="F5F3EE"/>
         </a:solidFill>
+        <a:effectLst/>
       </p:bgPr>
     </p:bg>
     <p:spTree>
@@ -1257,9 +1026,11 @@
       <p:sp>
         <p:nvSpPr>
           <p:cNvPr id="2" name="Text 0"/>
-          <p:cNvSpPr/>
+          <p:cNvSpPr>
+            <a:spLocks noGrp="1"/>
+          </p:cNvSpPr>
           <p:nvPr>
-            <p:ph idx="100" type="body" hasCustomPrompt="1"/>
+            <p:ph type="body" idx="100" hasCustomPrompt="1"/>
           </p:nvPr>
         </p:nvSpPr>
         <p:spPr>
@@ -1276,9 +1047,9 @@
         <p:txBody>
           <a:bodyPr wrap="square" rtlCol="0"/>
           <a:lstStyle>
-            <a:lvl1pPr algn="l" indent="0" marL="0">
+            <a:lvl1pPr marL="0" indent="0" algn="l">
               <a:buNone/>
-              <a:defRPr lang="en-US" sz="1200" b="1" spc="200" kern="0" dirty="0">
+              <a:defRPr lang="en-US" sz="1200" b="1" kern="0" spc="200" dirty="0">
                 <a:solidFill>
                   <a:schemeClr val="accent1"/>
                 </a:solidFill>
@@ -1286,7 +1057,7 @@
             </a:lvl1pPr>
           </a:lstStyle>
           <a:p>
-            <a:pPr algn="l" indent="0" marL="0">
+            <a:pPr marL="0" indent="0" algn="l">
               <a:buNone/>
             </a:pPr>
             <a:endParaRPr lang="en-US" sz="1200" dirty="0"/>
@@ -1296,9 +1067,11 @@
       <p:sp>
         <p:nvSpPr>
           <p:cNvPr id="3" name="Text 0"/>
-          <p:cNvSpPr/>
+          <p:cNvSpPr>
+            <a:spLocks noGrp="1"/>
+          </p:cNvSpPr>
           <p:nvPr>
-            <p:ph idx="101" type="title" hasCustomPrompt="1"/>
+            <p:ph type="title" idx="101" hasCustomPrompt="1"/>
           </p:nvPr>
         </p:nvSpPr>
         <p:spPr>
@@ -1315,7 +1088,7 @@
         <p:txBody>
           <a:bodyPr wrap="square" rtlCol="0"/>
           <a:lstStyle>
-            <a:lvl1pPr algn="l" indent="0" marL="0">
+            <a:lvl1pPr marL="0" indent="0" algn="l">
               <a:buNone/>
               <a:defRPr lang="en-US" sz="3200" b="1" dirty="0">
                 <a:solidFill>
@@ -1325,7 +1098,7 @@
             </a:lvl1pPr>
           </a:lstStyle>
           <a:p>
-            <a:pPr algn="l" indent="0" marL="0">
+            <a:pPr marL="0" indent="0" algn="l">
               <a:buNone/>
             </a:pPr>
             <a:endParaRPr lang="en-US" sz="3200" dirty="0"/>
@@ -1353,7 +1126,7 @@
           <a:bodyPr wrap="square" lIns="0" tIns="0" rIns="0" bIns="0" rtlCol="0" anchor="ctr"/>
           <a:lstStyle/>
           <a:p>
-            <a:pPr indent="0" marL="0">
+            <a:pPr marL="0" indent="0">
               <a:buNone/>
             </a:pPr>
             <a:r>
@@ -1388,7 +1161,7 @@
           </a:prstGeom>
           <a:extLst>
             <a:ext uri="{C572A759-6A51-4108-AA02-DFA0A04FC94B}">
-              <ma14:wrappingTextBoxFlag xmlns:ma14="http://schemas.microsoft.com/office/mac/drawingml/2011/main" val="0"/>
+              <ma14:wrappingTextBoxFlag xmlns:ma14="http://schemas.microsoft.com/office/mac/drawingml/2011/main" xmlns="" val="0"/>
             </a:ext>
           </a:extLst>
         </p:spPr>
@@ -1406,8 +1179,8 @@
           <a:p>
             <a:pPr algn="r"/>
             <a:fld id="{F7021451-1387-4CA6-816F-3879F97B5CBC}" type="slidenum">
-              <a:rPr b="0" lang="en-US"/>
-              <a:t>1002</a:t>
+              <a:rPr lang="en-US" b="0"/>
+              <a:t>‹#›</a:t>
             </a:fld>
             <a:endParaRPr lang="en-US"/>
           </a:p>
@@ -1429,6 +1202,7 @@
         <a:solidFill>
           <a:srgbClr val="161A22"/>
         </a:solidFill>
+        <a:effectLst/>
       </p:bgPr>
     </p:bg>
     <p:spTree>
@@ -1448,9 +1222,11 @@
       <p:sp>
         <p:nvSpPr>
           <p:cNvPr id="2" name="Text 0"/>
-          <p:cNvSpPr/>
+          <p:cNvSpPr>
+            <a:spLocks noGrp="1"/>
+          </p:cNvSpPr>
           <p:nvPr>
-            <p:ph idx="100" type="body" hasCustomPrompt="1"/>
+            <p:ph type="body" idx="100" hasCustomPrompt="1"/>
           </p:nvPr>
         </p:nvSpPr>
         <p:spPr>
@@ -1467,9 +1243,9 @@
         <p:txBody>
           <a:bodyPr wrap="square" rtlCol="0"/>
           <a:lstStyle>
-            <a:lvl1pPr algn="l" indent="0" marL="0">
+            <a:lvl1pPr marL="0" indent="0" algn="l">
               <a:buNone/>
-              <a:defRPr lang="en-US" sz="1200" b="1" spc="200" kern="0" dirty="0">
+              <a:defRPr lang="en-US" sz="1200" b="1" kern="0" spc="200" dirty="0">
                 <a:solidFill>
                   <a:schemeClr val="accent3"/>
                 </a:solidFill>
@@ -1477,7 +1253,7 @@
             </a:lvl1pPr>
           </a:lstStyle>
           <a:p>
-            <a:pPr algn="l" indent="0" marL="0">
+            <a:pPr marL="0" indent="0" algn="l">
               <a:buNone/>
             </a:pPr>
             <a:endParaRPr lang="en-US" sz="1200" dirty="0"/>
@@ -1487,9 +1263,11 @@
       <p:sp>
         <p:nvSpPr>
           <p:cNvPr id="3" name="Text 0"/>
-          <p:cNvSpPr/>
+          <p:cNvSpPr>
+            <a:spLocks noGrp="1"/>
+          </p:cNvSpPr>
           <p:nvPr>
-            <p:ph idx="101" type="title" hasCustomPrompt="1"/>
+            <p:ph type="title" idx="101" hasCustomPrompt="1"/>
           </p:nvPr>
         </p:nvSpPr>
         <p:spPr>
@@ -1506,7 +1284,7 @@
         <p:txBody>
           <a:bodyPr wrap="square" rtlCol="0"/>
           <a:lstStyle>
-            <a:lvl1pPr algn="l" indent="0" marL="0">
+            <a:lvl1pPr marL="0" indent="0" algn="l">
               <a:buNone/>
               <a:defRPr lang="en-US" sz="4000" b="1" dirty="0">
                 <a:solidFill>
@@ -1516,7 +1294,7 @@
             </a:lvl1pPr>
           </a:lstStyle>
           <a:p>
-            <a:pPr algn="l" indent="0" marL="0">
+            <a:pPr marL="0" indent="0" algn="l">
               <a:buNone/>
             </a:pPr>
             <a:endParaRPr lang="en-US" sz="4000" dirty="0"/>
@@ -1534,6 +1312,11 @@
 <file path=ppt/slideMasters/slideMaster1.xml><?xml version="1.0" encoding="utf-8"?>
 <p:sldMaster xmlns:a="http://schemas.openxmlformats.org/drawingml/2006/main" xmlns:r="http://schemas.openxmlformats.org/officeDocument/2006/relationships" xmlns:p="http://schemas.openxmlformats.org/presentationml/2006/main">
   <p:cSld>
+    <p:bg>
+      <p:bgRef idx="1001">
+        <a:schemeClr val="bg1"/>
+      </p:bgRef>
+    </p:bg>
     <p:spTree>
       <p:nvGrpSpPr>
         <p:cNvPr id="1" name=""/>
@@ -1568,7 +1351,7 @@
           </a:prstGeom>
           <a:extLst>
             <a:ext uri="{C572A759-6A51-4108-AA02-DFA0A04FC94B}">
-              <ma14:wrappingTextBoxFlag xmlns:ma14="http://schemas.microsoft.com/office/mac/drawingml/2011/main" val="0"/>
+              <ma14:wrappingTextBoxFlag xmlns:ma14="http://schemas.microsoft.com/office/mac/drawingml/2011/main" xmlns="" val="0"/>
             </a:ext>
           </a:extLst>
         </p:spPr>
@@ -1586,8 +1369,8 @@
           <a:p>
             <a:pPr algn="r"/>
             <a:fld id="{F7021451-1387-4CA6-816F-3879F97B5CBC}" type="slidenum">
-              <a:rPr b="0" lang="en-US"/>
-              <a:t>null</a:t>
+              <a:rPr lang="en-US" b="0"/>
+              <a:t>‹#›</a:t>
             </a:fld>
             <a:endParaRPr lang="en-US"/>
           </a:p>
@@ -1875,9 +1658,11 @@
       <p:sp>
         <p:nvSpPr>
           <p:cNvPr id="2" name="Text 0"/>
-          <p:cNvSpPr/>
+          <p:cNvSpPr>
+            <a:spLocks noGrp="1"/>
+          </p:cNvSpPr>
           <p:nvPr>
-            <p:ph idx="100" type="body" hasCustomPrompt="1"/>
+            <p:ph type="body" idx="100" hasCustomPrompt="1"/>
           </p:nvPr>
         </p:nvSpPr>
         <p:spPr>
@@ -1895,11 +1680,11 @@
           <a:bodyPr wrap="square" lIns="0" tIns="0" rIns="0" bIns="0" rtlCol="0" anchor="t"/>
           <a:lstStyle/>
           <a:p>
-            <a:pPr algn="l" indent="0" marL="0">
+            <a:pPr marL="0" indent="0" algn="l">
               <a:buNone/>
             </a:pPr>
             <a:r>
-              <a:rPr lang="en-US" sz="1200" b="1" spc="200" kern="0" dirty="0">
+              <a:rPr lang="en-US" sz="1200" b="1" kern="0" spc="200" dirty="0">
                 <a:solidFill>
                   <a:schemeClr val="accent3"/>
                 </a:solidFill>
@@ -1913,9 +1698,11 @@
       <p:sp>
         <p:nvSpPr>
           <p:cNvPr id="3" name="Text 0"/>
-          <p:cNvSpPr/>
+          <p:cNvSpPr>
+            <a:spLocks noGrp="1"/>
+          </p:cNvSpPr>
           <p:nvPr>
-            <p:ph idx="101" type="title" hasCustomPrompt="1"/>
+            <p:ph type="title" idx="101" hasCustomPrompt="1"/>
           </p:nvPr>
         </p:nvSpPr>
         <p:spPr>
@@ -1933,7 +1720,7 @@
           <a:bodyPr wrap="square" lIns="0" tIns="0" rIns="0" bIns="0" rtlCol="0" anchor="t"/>
           <a:lstStyle/>
           <a:p>
-            <a:pPr algn="l" indent="0" marL="0">
+            <a:pPr marL="0" indent="0" algn="l">
               <a:buNone/>
             </a:pPr>
             <a:r>
@@ -1969,7 +1756,7 @@
           <a:bodyPr wrap="square" lIns="0" tIns="0" rIns="0" bIns="0" rtlCol="0" anchor="t"/>
           <a:lstStyle/>
           <a:p>
-            <a:pPr indent="0" marL="0">
+            <a:pPr marL="0" indent="0">
               <a:buNone/>
             </a:pPr>
             <a:r>
@@ -2005,7 +1792,7 @@
           <a:bodyPr wrap="square" lIns="0" tIns="0" rIns="0" bIns="0" rtlCol="0" anchor="t"/>
           <a:lstStyle/>
           <a:p>
-            <a:pPr indent="0" marL="0">
+            <a:pPr marL="0" indent="0">
               <a:buNone/>
             </a:pPr>
             <a:r>
@@ -2041,7 +1828,7 @@
           <a:bodyPr wrap="square" lIns="0" tIns="0" rIns="0" bIns="0" rtlCol="0" anchor="t"/>
           <a:lstStyle/>
           <a:p>
-            <a:pPr algn="r" indent="0" marL="0">
+            <a:pPr marL="0" indent="0" algn="r">
               <a:buNone/>
             </a:pPr>
             <a:r>
@@ -2084,9 +1871,11 @@
       <p:sp>
         <p:nvSpPr>
           <p:cNvPr id="2" name="Text 0"/>
-          <p:cNvSpPr/>
+          <p:cNvSpPr>
+            <a:spLocks noGrp="1"/>
+          </p:cNvSpPr>
           <p:nvPr>
-            <p:ph idx="100" type="body" hasCustomPrompt="1"/>
+            <p:ph type="body" idx="100" hasCustomPrompt="1"/>
           </p:nvPr>
         </p:nvSpPr>
         <p:spPr>
@@ -2104,11 +1893,11 @@
           <a:bodyPr wrap="square" lIns="0" tIns="0" rIns="0" bIns="0" rtlCol="0" anchor="t"/>
           <a:lstStyle/>
           <a:p>
-            <a:pPr algn="l" indent="0" marL="0">
+            <a:pPr marL="0" indent="0" algn="l">
               <a:buNone/>
             </a:pPr>
             <a:r>
-              <a:rPr lang="en-US" sz="1200" b="1" spc="200" kern="0" dirty="0">
+              <a:rPr lang="en-US" sz="1200" b="1" kern="0" spc="200" dirty="0">
                 <a:solidFill>
                   <a:schemeClr val="accent1"/>
                 </a:solidFill>
@@ -2122,9 +1911,11 @@
       <p:sp>
         <p:nvSpPr>
           <p:cNvPr id="3" name="Text 0"/>
-          <p:cNvSpPr/>
+          <p:cNvSpPr>
+            <a:spLocks noGrp="1"/>
+          </p:cNvSpPr>
           <p:nvPr>
-            <p:ph idx="101" type="title" hasCustomPrompt="1"/>
+            <p:ph type="title" idx="101" hasCustomPrompt="1"/>
           </p:nvPr>
         </p:nvSpPr>
         <p:spPr>
@@ -2142,7 +1933,7 @@
           <a:bodyPr wrap="square" lIns="0" tIns="0" rIns="0" bIns="0" rtlCol="0" anchor="t"/>
           <a:lstStyle/>
           <a:p>
-            <a:pPr algn="l" indent="0" marL="0">
+            <a:pPr marL="0" indent="0" algn="l">
               <a:buNone/>
             </a:pPr>
             <a:r>
@@ -2159,7 +1950,7 @@
       </p:sp>
       <p:graphicFrame>
         <p:nvGraphicFramePr>
-          <p:cNvPr id="3" name="Decomposition map"/>
+          <p:cNvPr id="4" name="Decomposition map"/>
           <p:cNvGraphicFramePr>
             <a:graphicFrameLocks noGrp="1"/>
           </p:cNvGraphicFramePr>
@@ -2180,10 +1971,34 @@
             <a:tbl>
               <a:tblPr/>
               <a:tblGrid>
-                <a:gridCol w="2011680"/>
-                <a:gridCol w="1828800"/>
-                <a:gridCol w="5425135"/>
-                <a:gridCol w="1645920"/>
+                <a:gridCol w="2011680">
+                  <a:extLst>
+                    <a:ext uri="{9D8B030D-6E8A-4147-A177-3AD203B41FA5}">
+                      <a16:colId xmlns:a16="http://schemas.microsoft.com/office/drawing/2014/main" val="20000"/>
+                    </a:ext>
+                  </a:extLst>
+                </a:gridCol>
+                <a:gridCol w="1828800">
+                  <a:extLst>
+                    <a:ext uri="{9D8B030D-6E8A-4147-A177-3AD203B41FA5}">
+                      <a16:colId xmlns:a16="http://schemas.microsoft.com/office/drawing/2014/main" val="20001"/>
+                    </a:ext>
+                  </a:extLst>
+                </a:gridCol>
+                <a:gridCol w="5425135">
+                  <a:extLst>
+                    <a:ext uri="{9D8B030D-6E8A-4147-A177-3AD203B41FA5}">
+                      <a16:colId xmlns:a16="http://schemas.microsoft.com/office/drawing/2014/main" val="20002"/>
+                    </a:ext>
+                  </a:extLst>
+                </a:gridCol>
+                <a:gridCol w="1645920">
+                  <a:extLst>
+                    <a:ext uri="{9D8B030D-6E8A-4147-A177-3AD203B41FA5}">
+                      <a16:colId xmlns:a16="http://schemas.microsoft.com/office/drawing/2014/main" val="20003"/>
+                    </a:ext>
+                  </a:extLst>
+                </a:gridCol>
               </a:tblGrid>
               <a:tr h="548640">
                 <a:tc>
@@ -2191,7 +2006,7 @@
                     <a:bodyPr/>
                     <a:lstStyle/>
                     <a:p>
-                      <a:pPr indent="0" marL="0">
+                      <a:pPr marL="0" indent="0">
                         <a:buNone/>
                       </a:pPr>
                       <a:r>
@@ -2259,7 +2074,7 @@
                     <a:bodyPr/>
                     <a:lstStyle/>
                     <a:p>
-                      <a:pPr indent="0" marL="0">
+                      <a:pPr marL="0" indent="0">
                         <a:buNone/>
                       </a:pPr>
                       <a:r>
@@ -2327,7 +2142,7 @@
                     <a:bodyPr/>
                     <a:lstStyle/>
                     <a:p>
-                      <a:pPr indent="0" marL="0">
+                      <a:pPr marL="0" indent="0">
                         <a:buNone/>
                       </a:pPr>
                       <a:r>
@@ -2395,7 +2210,7 @@
                     <a:bodyPr/>
                     <a:lstStyle/>
                     <a:p>
-                      <a:pPr indent="0" marL="0">
+                      <a:pPr marL="0" indent="0">
                         <a:buNone/>
                       </a:pPr>
                       <a:r>
@@ -2458,6 +2273,11 @@
                     </a:solidFill>
                   </a:tcPr>
                 </a:tc>
+                <a:extLst>
+                  <a:ext uri="{0D108BD9-81ED-4DB2-BD59-A6C34878D82A}">
+                    <a16:rowId xmlns:a16="http://schemas.microsoft.com/office/drawing/2014/main" val="10000"/>
+                  </a:ext>
+                </a:extLst>
               </a:tr>
               <a:tr h="548640">
                 <a:tc>
@@ -2465,7 +2285,7 @@
                     <a:bodyPr/>
                     <a:lstStyle/>
                     <a:p>
-                      <a:pPr indent="0" marL="0">
+                      <a:pPr marL="0" indent="0">
                         <a:buNone/>
                       </a:pPr>
                       <a:r>
@@ -2533,7 +2353,7 @@
                     <a:bodyPr/>
                     <a:lstStyle/>
                     <a:p>
-                      <a:pPr indent="0" marL="0">
+                      <a:pPr marL="0" indent="0">
                         <a:buNone/>
                       </a:pPr>
                       <a:r>
@@ -2601,7 +2421,7 @@
                     <a:bodyPr/>
                     <a:lstStyle/>
                     <a:p>
-                      <a:pPr indent="0" marL="0">
+                      <a:pPr marL="0" indent="0">
                         <a:buNone/>
                       </a:pPr>
                       <a:r>
@@ -2669,7 +2489,7 @@
                     <a:bodyPr/>
                     <a:lstStyle/>
                     <a:p>
-                      <a:pPr indent="0" marL="0">
+                      <a:pPr marL="0" indent="0">
                         <a:buNone/>
                       </a:pPr>
                       <a:r>
@@ -2732,6 +2552,11 @@
                     </a:solidFill>
                   </a:tcPr>
                 </a:tc>
+                <a:extLst>
+                  <a:ext uri="{0D108BD9-81ED-4DB2-BD59-A6C34878D82A}">
+                    <a16:rowId xmlns:a16="http://schemas.microsoft.com/office/drawing/2014/main" val="10001"/>
+                  </a:ext>
+                </a:extLst>
               </a:tr>
               <a:tr h="548640">
                 <a:tc>
@@ -2739,7 +2564,7 @@
                     <a:bodyPr/>
                     <a:lstStyle/>
                     <a:p>
-                      <a:pPr indent="0" marL="0">
+                      <a:pPr marL="0" indent="0">
                         <a:buNone/>
                       </a:pPr>
                       <a:r>
@@ -2807,7 +2632,7 @@
                     <a:bodyPr/>
                     <a:lstStyle/>
                     <a:p>
-                      <a:pPr indent="0" marL="0">
+                      <a:pPr marL="0" indent="0">
                         <a:buNone/>
                       </a:pPr>
                       <a:r>
@@ -2875,7 +2700,7 @@
                     <a:bodyPr/>
                     <a:lstStyle/>
                     <a:p>
-                      <a:pPr indent="0" marL="0">
+                      <a:pPr marL="0" indent="0">
                         <a:buNone/>
                       </a:pPr>
                       <a:r>
@@ -2943,7 +2768,7 @@
                     <a:bodyPr/>
                     <a:lstStyle/>
                     <a:p>
-                      <a:pPr indent="0" marL="0">
+                      <a:pPr marL="0" indent="0">
                         <a:buNone/>
                       </a:pPr>
                       <a:r>
@@ -3006,6 +2831,11 @@
                     </a:solidFill>
                   </a:tcPr>
                 </a:tc>
+                <a:extLst>
+                  <a:ext uri="{0D108BD9-81ED-4DB2-BD59-A6C34878D82A}">
+                    <a16:rowId xmlns:a16="http://schemas.microsoft.com/office/drawing/2014/main" val="10002"/>
+                  </a:ext>
+                </a:extLst>
               </a:tr>
               <a:tr h="548640">
                 <a:tc>
@@ -3013,7 +2843,7 @@
                     <a:bodyPr/>
                     <a:lstStyle/>
                     <a:p>
-                      <a:pPr indent="0" marL="0">
+                      <a:pPr marL="0" indent="0">
                         <a:buNone/>
                       </a:pPr>
                       <a:r>
@@ -3081,7 +2911,7 @@
                     <a:bodyPr/>
                     <a:lstStyle/>
                     <a:p>
-                      <a:pPr indent="0" marL="0">
+                      <a:pPr marL="0" indent="0">
                         <a:buNone/>
                       </a:pPr>
                       <a:r>
@@ -3149,7 +2979,7 @@
                     <a:bodyPr/>
                     <a:lstStyle/>
                     <a:p>
-                      <a:pPr indent="0" marL="0">
+                      <a:pPr marL="0" indent="0">
                         <a:buNone/>
                       </a:pPr>
                       <a:r>
@@ -3217,7 +3047,7 @@
                     <a:bodyPr/>
                     <a:lstStyle/>
                     <a:p>
-                      <a:pPr indent="0" marL="0">
+                      <a:pPr marL="0" indent="0">
                         <a:buNone/>
                       </a:pPr>
                       <a:r>
@@ -3280,6 +3110,11 @@
                     </a:solidFill>
                   </a:tcPr>
                 </a:tc>
+                <a:extLst>
+                  <a:ext uri="{0D108BD9-81ED-4DB2-BD59-A6C34878D82A}">
+                    <a16:rowId xmlns:a16="http://schemas.microsoft.com/office/drawing/2014/main" val="10003"/>
+                  </a:ext>
+                </a:extLst>
               </a:tr>
               <a:tr h="548640">
                 <a:tc>
@@ -3287,7 +3122,7 @@
                     <a:bodyPr/>
                     <a:lstStyle/>
                     <a:p>
-                      <a:pPr indent="0" marL="0">
+                      <a:pPr marL="0" indent="0">
                         <a:buNone/>
                       </a:pPr>
                       <a:r>
@@ -3355,7 +3190,7 @@
                     <a:bodyPr/>
                     <a:lstStyle/>
                     <a:p>
-                      <a:pPr indent="0" marL="0">
+                      <a:pPr marL="0" indent="0">
                         <a:buNone/>
                       </a:pPr>
                       <a:r>
@@ -3423,7 +3258,7 @@
                     <a:bodyPr/>
                     <a:lstStyle/>
                     <a:p>
-                      <a:pPr indent="0" marL="0">
+                      <a:pPr marL="0" indent="0">
                         <a:buNone/>
                       </a:pPr>
                       <a:r>
@@ -3491,7 +3326,7 @@
                     <a:bodyPr/>
                     <a:lstStyle/>
                     <a:p>
-                      <a:pPr indent="0" marL="0">
+                      <a:pPr marL="0" indent="0">
                         <a:buNone/>
                       </a:pPr>
                       <a:r>
@@ -3554,6 +3389,11 @@
                     </a:solidFill>
                   </a:tcPr>
                 </a:tc>
+                <a:extLst>
+                  <a:ext uri="{0D108BD9-81ED-4DB2-BD59-A6C34878D82A}">
+                    <a16:rowId xmlns:a16="http://schemas.microsoft.com/office/drawing/2014/main" val="10004"/>
+                  </a:ext>
+                </a:extLst>
               </a:tr>
               <a:tr h="548640">
                 <a:tc>
@@ -3561,7 +3401,7 @@
                     <a:bodyPr/>
                     <a:lstStyle/>
                     <a:p>
-                      <a:pPr indent="0" marL="0">
+                      <a:pPr marL="0" indent="0">
                         <a:buNone/>
                       </a:pPr>
                       <a:r>
@@ -3629,7 +3469,7 @@
                     <a:bodyPr/>
                     <a:lstStyle/>
                     <a:p>
-                      <a:pPr indent="0" marL="0">
+                      <a:pPr marL="0" indent="0">
                         <a:buNone/>
                       </a:pPr>
                       <a:r>
@@ -3697,7 +3537,7 @@
                     <a:bodyPr/>
                     <a:lstStyle/>
                     <a:p>
-                      <a:pPr indent="0" marL="0">
+                      <a:pPr marL="0" indent="0">
                         <a:buNone/>
                       </a:pPr>
                       <a:r>
@@ -3765,7 +3605,7 @@
                     <a:bodyPr/>
                     <a:lstStyle/>
                     <a:p>
-                      <a:pPr indent="0" marL="0">
+                      <a:pPr marL="0" indent="0">
                         <a:buNone/>
                       </a:pPr>
                       <a:r>
@@ -3828,6 +3668,11 @@
                     </a:solidFill>
                   </a:tcPr>
                 </a:tc>
+                <a:extLst>
+                  <a:ext uri="{0D108BD9-81ED-4DB2-BD59-A6C34878D82A}">
+                    <a16:rowId xmlns:a16="http://schemas.microsoft.com/office/drawing/2014/main" val="10005"/>
+                  </a:ext>
+                </a:extLst>
               </a:tr>
               <a:tr h="548640">
                 <a:tc>
@@ -3835,7 +3680,7 @@
                     <a:bodyPr/>
                     <a:lstStyle/>
                     <a:p>
-                      <a:pPr indent="0" marL="0">
+                      <a:pPr marL="0" indent="0">
                         <a:buNone/>
                       </a:pPr>
                       <a:r>
@@ -3903,7 +3748,7 @@
                     <a:bodyPr/>
                     <a:lstStyle/>
                     <a:p>
-                      <a:pPr indent="0" marL="0">
+                      <a:pPr marL="0" indent="0">
                         <a:buNone/>
                       </a:pPr>
                       <a:r>
@@ -3971,7 +3816,7 @@
                     <a:bodyPr/>
                     <a:lstStyle/>
                     <a:p>
-                      <a:pPr indent="0" marL="0">
+                      <a:pPr marL="0" indent="0">
                         <a:buNone/>
                       </a:pPr>
                       <a:r>
@@ -4039,7 +3884,7 @@
                     <a:bodyPr/>
                     <a:lstStyle/>
                     <a:p>
-                      <a:pPr indent="0" marL="0">
+                      <a:pPr marL="0" indent="0">
                         <a:buNone/>
                       </a:pPr>
                       <a:r>
@@ -4102,6 +3947,11 @@
                     </a:solidFill>
                   </a:tcPr>
                 </a:tc>
+                <a:extLst>
+                  <a:ext uri="{0D108BD9-81ED-4DB2-BD59-A6C34878D82A}">
+                    <a16:rowId xmlns:a16="http://schemas.microsoft.com/office/drawing/2014/main" val="10006"/>
+                  </a:ext>
+                </a:extLst>
               </a:tr>
             </a:tbl>
           </a:graphicData>
@@ -4127,7 +3977,7 @@
           </a:prstGeom>
           <a:extLst>
             <a:ext uri="{C572A759-6A51-4108-AA02-DFA0A04FC94B}">
-              <ma14:wrappingTextBoxFlag xmlns:ma14="http://schemas.microsoft.com/office/mac/drawingml/2011/main" val="0"/>
+              <ma14:wrappingTextBoxFlag xmlns:ma14="http://schemas.microsoft.com/office/mac/drawingml/2011/main" xmlns="" val="0"/>
             </a:ext>
           </a:extLst>
         </p:spPr>
@@ -4145,7 +3995,7 @@
           <a:p>
             <a:pPr algn="r"/>
             <a:fld id="{F7021451-1387-4CA6-816F-3879F97B5CBC}" type="slidenum">
-              <a:rPr b="0" lang="en-US"/>
+              <a:rPr lang="en-US" b="0"/>
               <a:t>2</a:t>
             </a:fld>
             <a:endParaRPr lang="en-US"/>
@@ -4180,9 +4030,11 @@
       <p:sp>
         <p:nvSpPr>
           <p:cNvPr id="2" name="Text 0"/>
-          <p:cNvSpPr/>
+          <p:cNvSpPr>
+            <a:spLocks noGrp="1"/>
+          </p:cNvSpPr>
           <p:nvPr>
-            <p:ph idx="100" type="body" hasCustomPrompt="1"/>
+            <p:ph type="body" idx="100" hasCustomPrompt="1"/>
           </p:nvPr>
         </p:nvSpPr>
         <p:spPr>
@@ -4200,11 +4052,11 @@
           <a:bodyPr wrap="square" lIns="0" tIns="0" rIns="0" bIns="0" rtlCol="0" anchor="t"/>
           <a:lstStyle/>
           <a:p>
-            <a:pPr algn="l" indent="0" marL="0">
+            <a:pPr marL="0" indent="0" algn="l">
               <a:buNone/>
             </a:pPr>
             <a:r>
-              <a:rPr lang="en-US" sz="1200" b="1" spc="200" kern="0" dirty="0">
+              <a:rPr lang="en-US" sz="1200" b="1" kern="0" spc="200" dirty="0">
                 <a:solidFill>
                   <a:schemeClr val="accent1"/>
                 </a:solidFill>
@@ -4218,9 +4070,11 @@
       <p:sp>
         <p:nvSpPr>
           <p:cNvPr id="3" name="Text 0"/>
-          <p:cNvSpPr/>
+          <p:cNvSpPr>
+            <a:spLocks noGrp="1"/>
+          </p:cNvSpPr>
           <p:nvPr>
-            <p:ph idx="101" type="title" hasCustomPrompt="1"/>
+            <p:ph type="title" idx="101" hasCustomPrompt="1"/>
           </p:nvPr>
         </p:nvSpPr>
         <p:spPr>
@@ -4238,7 +4092,7 @@
           <a:bodyPr wrap="square" lIns="0" tIns="0" rIns="0" bIns="0" rtlCol="0" anchor="t"/>
           <a:lstStyle/>
           <a:p>
-            <a:pPr algn="l" indent="0" marL="0">
+            <a:pPr marL="0" indent="0" algn="l">
               <a:buNone/>
             </a:pPr>
             <a:r>
@@ -4279,6 +4133,13 @@
             <a:prstDash val="solid"/>
           </a:ln>
         </p:spPr>
+        <p:txBody>
+          <a:bodyPr/>
+          <a:lstStyle/>
+          <a:p>
+            <a:endParaRPr lang="en-US"/>
+          </a:p>
+        </p:txBody>
       </p:sp>
       <p:sp>
         <p:nvSpPr>
@@ -4301,7 +4162,7 @@
           <a:bodyPr wrap="square" lIns="0" tIns="0" rIns="0" bIns="0" rtlCol="0" anchor="t"/>
           <a:lstStyle/>
           <a:p>
-            <a:pPr indent="0" marL="0">
+            <a:pPr marL="0" indent="0">
               <a:buNone/>
             </a:pPr>
             <a:r>
@@ -4342,6 +4203,13 @@
             <a:prstDash val="solid"/>
           </a:ln>
         </p:spPr>
+        <p:txBody>
+          <a:bodyPr/>
+          <a:lstStyle/>
+          <a:p>
+            <a:endParaRPr lang="en-US"/>
+          </a:p>
+        </p:txBody>
       </p:sp>
       <p:sp>
         <p:nvSpPr>
@@ -4364,7 +4232,7 @@
           <a:bodyPr wrap="square" lIns="0" tIns="0" rIns="0" bIns="0" rtlCol="0" anchor="ctr"/>
           <a:lstStyle/>
           <a:p>
-            <a:pPr indent="0" marL="0">
+            <a:pPr marL="0" indent="0">
               <a:buNone/>
             </a:pPr>
             <a:r>
@@ -4405,6 +4273,13 @@
             <a:prstDash val="solid"/>
           </a:ln>
         </p:spPr>
+        <p:txBody>
+          <a:bodyPr/>
+          <a:lstStyle/>
+          <a:p>
+            <a:endParaRPr lang="en-US"/>
+          </a:p>
+        </p:txBody>
       </p:sp>
       <p:sp>
         <p:nvSpPr>
@@ -4427,7 +4302,7 @@
           <a:bodyPr wrap="square" lIns="0" tIns="0" rIns="0" bIns="0" rtlCol="0" anchor="ctr"/>
           <a:lstStyle/>
           <a:p>
-            <a:pPr indent="0" marL="0">
+            <a:pPr marL="0" indent="0">
               <a:buNone/>
             </a:pPr>
             <a:r>
@@ -4468,6 +4343,13 @@
             <a:prstDash val="solid"/>
           </a:ln>
         </p:spPr>
+        <p:txBody>
+          <a:bodyPr/>
+          <a:lstStyle/>
+          <a:p>
+            <a:endParaRPr lang="en-US"/>
+          </a:p>
+        </p:txBody>
       </p:sp>
       <p:sp>
         <p:nvSpPr>
@@ -4490,7 +4372,7 @@
           <a:bodyPr wrap="square" lIns="0" tIns="0" rIns="0" bIns="0" rtlCol="0" anchor="ctr"/>
           <a:lstStyle/>
           <a:p>
-            <a:pPr indent="0" marL="0">
+            <a:pPr marL="0" indent="0">
               <a:buNone/>
             </a:pPr>
             <a:r>
@@ -4531,6 +4413,13 @@
             <a:prstDash val="solid"/>
           </a:ln>
         </p:spPr>
+        <p:txBody>
+          <a:bodyPr/>
+          <a:lstStyle/>
+          <a:p>
+            <a:endParaRPr lang="en-US"/>
+          </a:p>
+        </p:txBody>
       </p:sp>
       <p:sp>
         <p:nvSpPr>
@@ -4553,7 +4442,7 @@
           <a:bodyPr wrap="square" lIns="0" tIns="0" rIns="0" bIns="0" rtlCol="0" anchor="ctr"/>
           <a:lstStyle/>
           <a:p>
-            <a:pPr indent="0" marL="0">
+            <a:pPr marL="0" indent="0">
               <a:buNone/>
             </a:pPr>
             <a:r>
@@ -4594,6 +4483,13 @@
             <a:prstDash val="solid"/>
           </a:ln>
         </p:spPr>
+        <p:txBody>
+          <a:bodyPr/>
+          <a:lstStyle/>
+          <a:p>
+            <a:endParaRPr lang="en-US"/>
+          </a:p>
+        </p:txBody>
       </p:sp>
       <p:sp>
         <p:nvSpPr>
@@ -4616,7 +4512,7 @@
           <a:bodyPr wrap="square" lIns="0" tIns="0" rIns="0" bIns="0" rtlCol="0" anchor="t"/>
           <a:lstStyle/>
           <a:p>
-            <a:pPr indent="0" marL="0">
+            <a:pPr marL="0" indent="0">
               <a:buNone/>
             </a:pPr>
             <a:r>
@@ -4657,6 +4553,13 @@
             <a:prstDash val="solid"/>
           </a:ln>
         </p:spPr>
+        <p:txBody>
+          <a:bodyPr/>
+          <a:lstStyle/>
+          <a:p>
+            <a:endParaRPr lang="en-US"/>
+          </a:p>
+        </p:txBody>
       </p:sp>
       <p:sp>
         <p:nvSpPr>
@@ -4679,7 +4582,7 @@
           <a:bodyPr wrap="square" lIns="0" tIns="0" rIns="0" bIns="0" rtlCol="0" anchor="ctr"/>
           <a:lstStyle/>
           <a:p>
-            <a:pPr indent="0" marL="0">
+            <a:pPr marL="0" indent="0">
               <a:buNone/>
             </a:pPr>
             <a:r>
@@ -4720,6 +4623,13 @@
             <a:prstDash val="solid"/>
           </a:ln>
         </p:spPr>
+        <p:txBody>
+          <a:bodyPr/>
+          <a:lstStyle/>
+          <a:p>
+            <a:endParaRPr lang="en-US"/>
+          </a:p>
+        </p:txBody>
       </p:sp>
       <p:sp>
         <p:nvSpPr>
@@ -4742,7 +4652,7 @@
           <a:bodyPr wrap="square" lIns="0" tIns="0" rIns="0" bIns="0" rtlCol="0" anchor="ctr"/>
           <a:lstStyle/>
           <a:p>
-            <a:pPr indent="0" marL="0">
+            <a:pPr marL="0" indent="0">
               <a:buNone/>
             </a:pPr>
             <a:r>
@@ -4783,6 +4693,13 @@
             <a:prstDash val="solid"/>
           </a:ln>
         </p:spPr>
+        <p:txBody>
+          <a:bodyPr/>
+          <a:lstStyle/>
+          <a:p>
+            <a:endParaRPr lang="en-US"/>
+          </a:p>
+        </p:txBody>
       </p:sp>
       <p:sp>
         <p:nvSpPr>
@@ -4805,7 +4722,7 @@
           <a:bodyPr wrap="square" lIns="0" tIns="0" rIns="0" bIns="0" rtlCol="0" anchor="ctr"/>
           <a:lstStyle/>
           <a:p>
-            <a:pPr indent="0" marL="0">
+            <a:pPr marL="0" indent="0">
               <a:buNone/>
             </a:pPr>
             <a:r>
@@ -4846,6 +4763,13 @@
             <a:prstDash val="solid"/>
           </a:ln>
         </p:spPr>
+        <p:txBody>
+          <a:bodyPr/>
+          <a:lstStyle/>
+          <a:p>
+            <a:endParaRPr lang="en-US"/>
+          </a:p>
+        </p:txBody>
       </p:sp>
       <p:sp>
         <p:nvSpPr>
@@ -4868,7 +4792,7 @@
           <a:bodyPr wrap="square" lIns="0" tIns="0" rIns="0" bIns="0" rtlCol="0" anchor="ctr"/>
           <a:lstStyle/>
           <a:p>
-            <a:pPr indent="0" marL="0">
+            <a:pPr marL="0" indent="0">
               <a:buNone/>
             </a:pPr>
             <a:r>
@@ -4909,6 +4833,13 @@
             <a:prstDash val="solid"/>
           </a:ln>
         </p:spPr>
+        <p:txBody>
+          <a:bodyPr/>
+          <a:lstStyle/>
+          <a:p>
+            <a:endParaRPr lang="en-US"/>
+          </a:p>
+        </p:txBody>
       </p:sp>
       <p:sp>
         <p:nvSpPr>
@@ -4931,7 +4862,7 @@
           <a:bodyPr wrap="square" lIns="0" tIns="0" rIns="0" bIns="0" rtlCol="0" anchor="ctr"/>
           <a:lstStyle/>
           <a:p>
-            <a:pPr indent="0" marL="0">
+            <a:pPr marL="0" indent="0">
               <a:buNone/>
             </a:pPr>
             <a:r>
@@ -4967,7 +4898,7 @@
           <a:bodyPr wrap="square" lIns="0" tIns="0" rIns="0" bIns="0" rtlCol="0" anchor="t"/>
           <a:lstStyle/>
           <a:p>
-            <a:pPr indent="0" marL="0">
+            <a:pPr marL="0" indent="0">
               <a:buNone/>
             </a:pPr>
             <a:r>
@@ -5003,7 +4934,7 @@
           <a:bodyPr wrap="square" lIns="0" tIns="0" rIns="0" bIns="0" rtlCol="0" anchor="t"/>
           <a:lstStyle/>
           <a:p>
-            <a:pPr indent="0" marL="0">
+            <a:pPr marL="0" indent="0">
               <a:buNone/>
             </a:pPr>
             <a:r>
@@ -5039,7 +4970,7 @@
           <a:bodyPr wrap="square" lIns="0" tIns="0" rIns="0" bIns="0" rtlCol="0" anchor="t"/>
           <a:lstStyle/>
           <a:p>
-            <a:pPr indent="0" marL="0">
+            <a:pPr marL="0" indent="0">
               <a:buNone/>
             </a:pPr>
             <a:r>
@@ -5075,7 +5006,7 @@
           <a:bodyPr wrap="square" lIns="0" tIns="0" rIns="0" bIns="0" rtlCol="0" anchor="t"/>
           <a:lstStyle/>
           <a:p>
-            <a:pPr indent="0" marL="0">
+            <a:pPr marL="0" indent="0">
               <a:buNone/>
             </a:pPr>
             <a:r>
@@ -5111,7 +5042,7 @@
           <a:bodyPr wrap="square" lIns="0" tIns="0" rIns="0" bIns="0" rtlCol="0" anchor="t"/>
           <a:lstStyle/>
           <a:p>
-            <a:pPr algn="r" indent="0" marL="0">
+            <a:pPr marL="0" indent="0" algn="r">
               <a:buNone/>
             </a:pPr>
             <a:r>
@@ -5128,7 +5059,7 @@
       </p:sp>
       <p:sp>
         <p:nvSpPr>
-          <p:cNvPr id="25" name="Slide Number Placeholder 0"/>
+          <p:cNvPr id="31" name="Slide Number Placeholder 0"/>
           <p:cNvSpPr>
             <a:spLocks noGrp="1"/>
           </p:cNvSpPr>
@@ -5146,7 +5077,7 @@
           </a:prstGeom>
           <a:extLst>
             <a:ext uri="{C572A759-6A51-4108-AA02-DFA0A04FC94B}">
-              <ma14:wrappingTextBoxFlag xmlns:ma14="http://schemas.microsoft.com/office/mac/drawingml/2011/main" val="0"/>
+              <ma14:wrappingTextBoxFlag xmlns:ma14="http://schemas.microsoft.com/office/mac/drawingml/2011/main" xmlns="" val="0"/>
             </a:ext>
           </a:extLst>
         </p:spPr>
@@ -5164,7 +5095,7 @@
           <a:p>
             <a:pPr algn="r"/>
             <a:fld id="{F7021451-1387-4CA6-816F-3879F97B5CBC}" type="slidenum">
-              <a:rPr b="0" lang="en-US"/>
+              <a:rPr lang="en-US" b="0"/>
               <a:t>3</a:t>
             </a:fld>
             <a:endParaRPr lang="en-US"/>
@@ -5199,9 +5130,11 @@
       <p:sp>
         <p:nvSpPr>
           <p:cNvPr id="2" name="Text 0"/>
-          <p:cNvSpPr/>
+          <p:cNvSpPr>
+            <a:spLocks noGrp="1"/>
+          </p:cNvSpPr>
           <p:nvPr>
-            <p:ph idx="100" type="body" hasCustomPrompt="1"/>
+            <p:ph type="body" idx="100" hasCustomPrompt="1"/>
           </p:nvPr>
         </p:nvSpPr>
         <p:spPr>
@@ -5219,11 +5152,11 @@
           <a:bodyPr wrap="square" lIns="0" tIns="0" rIns="0" bIns="0" rtlCol="0" anchor="t"/>
           <a:lstStyle/>
           <a:p>
-            <a:pPr algn="l" indent="0" marL="0">
+            <a:pPr marL="0" indent="0" algn="l">
               <a:buNone/>
             </a:pPr>
             <a:r>
-              <a:rPr lang="en-US" sz="1200" b="1" spc="200" kern="0" dirty="0">
+              <a:rPr lang="en-US" sz="1200" b="1" kern="0" spc="200" dirty="0">
                 <a:solidFill>
                   <a:schemeClr val="accent1"/>
                 </a:solidFill>
@@ -5237,9 +5170,11 @@
       <p:sp>
         <p:nvSpPr>
           <p:cNvPr id="3" name="Text 0"/>
-          <p:cNvSpPr/>
+          <p:cNvSpPr>
+            <a:spLocks noGrp="1"/>
+          </p:cNvSpPr>
           <p:nvPr>
-            <p:ph idx="101" type="title" hasCustomPrompt="1"/>
+            <p:ph type="title" idx="101" hasCustomPrompt="1"/>
           </p:nvPr>
         </p:nvSpPr>
         <p:spPr>
@@ -5257,7 +5192,7 @@
           <a:bodyPr wrap="square" lIns="0" tIns="0" rIns="0" bIns="0" rtlCol="0" anchor="t"/>
           <a:lstStyle/>
           <a:p>
-            <a:pPr algn="l" indent="0" marL="0">
+            <a:pPr marL="0" indent="0" algn="l">
               <a:buNone/>
             </a:pPr>
             <a:r>
@@ -5298,6 +5233,13 @@
             <a:prstDash val="solid"/>
           </a:ln>
         </p:spPr>
+        <p:txBody>
+          <a:bodyPr/>
+          <a:lstStyle/>
+          <a:p>
+            <a:endParaRPr lang="en-US"/>
+          </a:p>
+        </p:txBody>
       </p:sp>
       <p:sp>
         <p:nvSpPr>
@@ -5320,7 +5262,7 @@
           <a:bodyPr wrap="square" lIns="0" tIns="0" rIns="0" bIns="0" rtlCol="0" anchor="t"/>
           <a:lstStyle/>
           <a:p>
-            <a:pPr indent="0" marL="0">
+            <a:pPr marL="0" indent="0">
               <a:buNone/>
             </a:pPr>
             <a:r>
@@ -5356,7 +5298,7 @@
           <a:bodyPr wrap="square" lIns="0" tIns="0" rIns="0" bIns="0" rtlCol="0" anchor="t"/>
           <a:lstStyle/>
           <a:p>
-            <a:pPr indent="0" marL="0">
+            <a:pPr marL="0" indent="0">
               <a:buNone/>
             </a:pPr>
             <a:r>
@@ -5392,7 +5334,7 @@
           <a:bodyPr wrap="square" lIns="0" tIns="0" rIns="0" bIns="0" rtlCol="0" anchor="ctr"/>
           <a:lstStyle/>
           <a:p>
-            <a:pPr indent="0" marL="0">
+            <a:pPr marL="0" indent="0">
               <a:buNone/>
             </a:pPr>
             <a:r>
@@ -5428,7 +5370,7 @@
           <a:bodyPr wrap="square" lIns="0" tIns="0" rIns="0" bIns="0" rtlCol="0" anchor="t"/>
           <a:lstStyle/>
           <a:p>
-            <a:pPr indent="0" marL="0">
+            <a:pPr marL="0" indent="0">
               <a:buNone/>
             </a:pPr>
             <a:r>
@@ -5464,7 +5406,7 @@
           <a:bodyPr wrap="square" lIns="0" tIns="0" rIns="0" bIns="0" rtlCol="0" anchor="t"/>
           <a:lstStyle/>
           <a:p>
-            <a:pPr indent="0" marL="0">
+            <a:pPr marL="0" indent="0">
               <a:buNone/>
             </a:pPr>
             <a:r>
@@ -5505,6 +5447,13 @@
             <a:prstDash val="solid"/>
           </a:ln>
         </p:spPr>
+        <p:txBody>
+          <a:bodyPr/>
+          <a:lstStyle/>
+          <a:p>
+            <a:endParaRPr lang="en-US"/>
+          </a:p>
+        </p:txBody>
       </p:sp>
       <p:sp>
         <p:nvSpPr>
@@ -5527,7 +5476,7 @@
           <a:bodyPr wrap="square" lIns="0" tIns="0" rIns="0" bIns="0" rtlCol="0" anchor="t"/>
           <a:lstStyle/>
           <a:p>
-            <a:pPr indent="0" marL="0">
+            <a:pPr marL="0" indent="0">
               <a:buNone/>
             </a:pPr>
             <a:r>
@@ -5563,7 +5512,7 @@
           <a:bodyPr wrap="square" lIns="0" tIns="0" rIns="0" bIns="0" rtlCol="0" anchor="t"/>
           <a:lstStyle/>
           <a:p>
-            <a:pPr indent="0" marL="0">
+            <a:pPr marL="0" indent="0">
               <a:buNone/>
             </a:pPr>
             <a:r>
@@ -5599,7 +5548,7 @@
           <a:bodyPr wrap="square" lIns="0" tIns="0" rIns="0" bIns="0" rtlCol="0" anchor="ctr"/>
           <a:lstStyle/>
           <a:p>
-            <a:pPr indent="0" marL="0">
+            <a:pPr marL="0" indent="0">
               <a:buNone/>
             </a:pPr>
             <a:r>
@@ -5635,7 +5584,7 @@
           <a:bodyPr wrap="square" lIns="0" tIns="0" rIns="0" bIns="0" rtlCol="0" anchor="t"/>
           <a:lstStyle/>
           <a:p>
-            <a:pPr indent="0" marL="0">
+            <a:pPr marL="0" indent="0">
               <a:buNone/>
             </a:pPr>
             <a:r>
@@ -5671,7 +5620,7 @@
           <a:bodyPr wrap="square" lIns="0" tIns="0" rIns="0" bIns="0" rtlCol="0" anchor="t"/>
           <a:lstStyle/>
           <a:p>
-            <a:pPr indent="0" marL="0">
+            <a:pPr marL="0" indent="0">
               <a:buNone/>
             </a:pPr>
             <a:r>
@@ -5712,6 +5661,13 @@
             <a:prstDash val="solid"/>
           </a:ln>
         </p:spPr>
+        <p:txBody>
+          <a:bodyPr/>
+          <a:lstStyle/>
+          <a:p>
+            <a:endParaRPr lang="en-US"/>
+          </a:p>
+        </p:txBody>
       </p:sp>
       <p:sp>
         <p:nvSpPr>
@@ -5734,7 +5690,7 @@
           <a:bodyPr wrap="square" lIns="0" tIns="0" rIns="0" bIns="0" rtlCol="0" anchor="t"/>
           <a:lstStyle/>
           <a:p>
-            <a:pPr indent="0" marL="0">
+            <a:pPr marL="0" indent="0">
               <a:buNone/>
             </a:pPr>
             <a:r>
@@ -5770,7 +5726,7 @@
           <a:bodyPr wrap="square" lIns="0" tIns="0" rIns="0" bIns="0" rtlCol="0" anchor="t"/>
           <a:lstStyle/>
           <a:p>
-            <a:pPr indent="0" marL="0">
+            <a:pPr marL="0" indent="0">
               <a:buNone/>
             </a:pPr>
             <a:r>
@@ -5806,7 +5762,7 @@
           <a:bodyPr wrap="square" lIns="0" tIns="0" rIns="0" bIns="0" rtlCol="0" anchor="ctr"/>
           <a:lstStyle/>
           <a:p>
-            <a:pPr indent="0" marL="0">
+            <a:pPr marL="0" indent="0">
               <a:buNone/>
             </a:pPr>
             <a:r>
@@ -5842,7 +5798,7 @@
           <a:bodyPr wrap="square" lIns="0" tIns="0" rIns="0" bIns="0" rtlCol="0" anchor="t"/>
           <a:lstStyle/>
           <a:p>
-            <a:pPr indent="0" marL="0">
+            <a:pPr marL="0" indent="0">
               <a:buNone/>
             </a:pPr>
             <a:r>
@@ -5878,7 +5834,7 @@
           <a:bodyPr wrap="square" lIns="0" tIns="0" rIns="0" bIns="0" rtlCol="0" anchor="t"/>
           <a:lstStyle/>
           <a:p>
-            <a:pPr indent="0" marL="0">
+            <a:pPr marL="0" indent="0">
               <a:buNone/>
             </a:pPr>
             <a:r>
@@ -5914,7 +5870,7 @@
           <a:bodyPr wrap="square" lIns="0" tIns="0" rIns="0" bIns="0" rtlCol="0" anchor="t"/>
           <a:lstStyle/>
           <a:p>
-            <a:pPr indent="0" marL="0">
+            <a:pPr marL="0" indent="0">
               <a:buNone/>
             </a:pPr>
             <a:r>
@@ -5925,9 +5881,6 @@
               </a:rPr>
               <a:t>The arc: </a:t>
             </a:r>
-            <a:pPr indent="0" marL="0">
-              <a:buNone/>
-            </a:pPr>
             <a:r>
               <a:rPr lang="en-US" sz="1500" dirty="0">
                 <a:solidFill>
@@ -5961,7 +5914,7 @@
           <a:bodyPr wrap="square" lIns="0" tIns="0" rIns="0" bIns="0" rtlCol="0" anchor="t"/>
           <a:lstStyle/>
           <a:p>
-            <a:pPr algn="r" indent="0" marL="0">
+            <a:pPr marL="0" indent="0" algn="r">
               <a:buNone/>
             </a:pPr>
             <a:r>
@@ -5996,7 +5949,7 @@
           </a:prstGeom>
           <a:extLst>
             <a:ext uri="{C572A759-6A51-4108-AA02-DFA0A04FC94B}">
-              <ma14:wrappingTextBoxFlag xmlns:ma14="http://schemas.microsoft.com/office/mac/drawingml/2011/main" val="0"/>
+              <ma14:wrappingTextBoxFlag xmlns:ma14="http://schemas.microsoft.com/office/mac/drawingml/2011/main" xmlns="" val="0"/>
             </a:ext>
           </a:extLst>
         </p:spPr>
@@ -6014,7 +5967,7 @@
           <a:p>
             <a:pPr algn="r"/>
             <a:fld id="{F7021451-1387-4CA6-816F-3879F97B5CBC}" type="slidenum">
-              <a:rPr b="0" lang="en-US"/>
+              <a:rPr lang="en-US" b="0"/>
               <a:t>4</a:t>
             </a:fld>
             <a:endParaRPr lang="en-US"/>
@@ -6049,9 +6002,11 @@
       <p:sp>
         <p:nvSpPr>
           <p:cNvPr id="2" name="Text 0"/>
-          <p:cNvSpPr/>
+          <p:cNvSpPr>
+            <a:spLocks noGrp="1"/>
+          </p:cNvSpPr>
           <p:nvPr>
-            <p:ph idx="100" type="body" hasCustomPrompt="1"/>
+            <p:ph type="body" idx="100" hasCustomPrompt="1"/>
           </p:nvPr>
         </p:nvSpPr>
         <p:spPr>
@@ -6069,11 +6024,11 @@
           <a:bodyPr wrap="square" lIns="0" tIns="0" rIns="0" bIns="0" rtlCol="0" anchor="t"/>
           <a:lstStyle/>
           <a:p>
-            <a:pPr algn="l" indent="0" marL="0">
+            <a:pPr marL="0" indent="0" algn="l">
               <a:buNone/>
             </a:pPr>
             <a:r>
-              <a:rPr lang="en-US" sz="1200" b="1" spc="200" kern="0" dirty="0">
+              <a:rPr lang="en-US" sz="1200" b="1" kern="0" spc="200" dirty="0">
                 <a:solidFill>
                   <a:schemeClr val="accent1"/>
                 </a:solidFill>
@@ -6087,9 +6042,11 @@
       <p:sp>
         <p:nvSpPr>
           <p:cNvPr id="3" name="Text 0"/>
-          <p:cNvSpPr/>
+          <p:cNvSpPr>
+            <a:spLocks noGrp="1"/>
+          </p:cNvSpPr>
           <p:nvPr>
-            <p:ph idx="101" type="title" hasCustomPrompt="1"/>
+            <p:ph type="title" idx="101" hasCustomPrompt="1"/>
           </p:nvPr>
         </p:nvSpPr>
         <p:spPr>
@@ -6107,7 +6064,7 @@
           <a:bodyPr wrap="square" lIns="0" tIns="0" rIns="0" bIns="0" rtlCol="0" anchor="t"/>
           <a:lstStyle/>
           <a:p>
-            <a:pPr algn="l" indent="0" marL="0">
+            <a:pPr marL="0" indent="0" algn="l">
               <a:buNone/>
             </a:pPr>
             <a:r>
@@ -6148,6 +6105,13 @@
             <a:prstDash val="dash"/>
           </a:ln>
         </p:spPr>
+        <p:txBody>
+          <a:bodyPr/>
+          <a:lstStyle/>
+          <a:p>
+            <a:endParaRPr lang="en-US"/>
+          </a:p>
+        </p:txBody>
       </p:sp>
       <p:sp>
         <p:nvSpPr>
@@ -6170,7 +6134,7 @@
           <a:bodyPr wrap="square" lIns="0" tIns="0" rIns="0" bIns="0" rtlCol="0" anchor="ctr"/>
           <a:lstStyle/>
           <a:p>
-            <a:pPr algn="ctr" indent="0" marL="0">
+            <a:pPr marL="0" indent="0" algn="ctr">
               <a:buNone/>
             </a:pPr>
             <a:r>
@@ -6206,7 +6170,7 @@
           <a:bodyPr wrap="square" lIns="0" tIns="0" rIns="0" bIns="0" rtlCol="0" anchor="t"/>
           <a:lstStyle/>
           <a:p>
-            <a:pPr algn="ctr" indent="0" marL="0">
+            <a:pPr marL="0" indent="0" algn="ctr">
               <a:buNone/>
             </a:pPr>
             <a:r>
@@ -6247,6 +6211,13 @@
             <a:prstDash val="solid"/>
           </a:ln>
         </p:spPr>
+        <p:txBody>
+          <a:bodyPr/>
+          <a:lstStyle/>
+          <a:p>
+            <a:endParaRPr lang="en-US"/>
+          </a:p>
+        </p:txBody>
       </p:sp>
       <p:sp>
         <p:nvSpPr>
@@ -6269,7 +6240,7 @@
           <a:bodyPr wrap="square" lIns="0" tIns="0" rIns="0" bIns="0" rtlCol="0" anchor="ctr"/>
           <a:lstStyle/>
           <a:p>
-            <a:pPr algn="ctr" indent="0" marL="0">
+            <a:pPr marL="0" indent="0" algn="ctr">
               <a:buNone/>
             </a:pPr>
             <a:r>
@@ -6310,6 +6281,13 @@
             <a:prstDash val="solid"/>
           </a:ln>
         </p:spPr>
+        <p:txBody>
+          <a:bodyPr/>
+          <a:lstStyle/>
+          <a:p>
+            <a:endParaRPr lang="en-US"/>
+          </a:p>
+        </p:txBody>
       </p:sp>
       <p:sp>
         <p:nvSpPr>
@@ -6332,7 +6310,7 @@
           <a:bodyPr wrap="square" lIns="0" tIns="0" rIns="0" bIns="0" rtlCol="0" anchor="ctr"/>
           <a:lstStyle/>
           <a:p>
-            <a:pPr algn="ctr" indent="0" marL="0">
+            <a:pPr marL="0" indent="0" algn="ctr">
               <a:buNone/>
             </a:pPr>
             <a:r>
@@ -6373,6 +6351,13 @@
             <a:prstDash val="solid"/>
           </a:ln>
         </p:spPr>
+        <p:txBody>
+          <a:bodyPr/>
+          <a:lstStyle/>
+          <a:p>
+            <a:endParaRPr lang="en-US"/>
+          </a:p>
+        </p:txBody>
       </p:sp>
       <p:sp>
         <p:nvSpPr>
@@ -6395,7 +6380,7 @@
           <a:bodyPr wrap="square" lIns="0" tIns="0" rIns="0" bIns="0" rtlCol="0" anchor="ctr"/>
           <a:lstStyle/>
           <a:p>
-            <a:pPr algn="ctr" indent="0" marL="0">
+            <a:pPr marL="0" indent="0" algn="ctr">
               <a:buNone/>
             </a:pPr>
             <a:r>
@@ -6436,6 +6421,13 @@
             <a:prstDash val="solid"/>
           </a:ln>
         </p:spPr>
+        <p:txBody>
+          <a:bodyPr/>
+          <a:lstStyle/>
+          <a:p>
+            <a:endParaRPr lang="en-US"/>
+          </a:p>
+        </p:txBody>
       </p:sp>
       <p:sp>
         <p:nvSpPr>
@@ -6458,7 +6450,7 @@
           <a:bodyPr wrap="square" lIns="0" tIns="0" rIns="0" bIns="0" rtlCol="0" anchor="ctr"/>
           <a:lstStyle/>
           <a:p>
-            <a:pPr algn="ctr" indent="0" marL="0">
+            <a:pPr marL="0" indent="0" algn="ctr">
               <a:buNone/>
             </a:pPr>
             <a:r>
@@ -6499,6 +6491,13 @@
             <a:prstDash val="solid"/>
           </a:ln>
         </p:spPr>
+        <p:txBody>
+          <a:bodyPr/>
+          <a:lstStyle/>
+          <a:p>
+            <a:endParaRPr lang="en-US"/>
+          </a:p>
+        </p:txBody>
       </p:sp>
       <p:sp>
         <p:nvSpPr>
@@ -6521,7 +6520,7 @@
           <a:bodyPr wrap="square" lIns="0" tIns="0" rIns="0" bIns="0" rtlCol="0" anchor="ctr"/>
           <a:lstStyle/>
           <a:p>
-            <a:pPr algn="ctr" indent="0" marL="0">
+            <a:pPr marL="0" indent="0" algn="ctr">
               <a:buNone/>
             </a:pPr>
             <a:r>
@@ -6562,6 +6561,13 @@
             <a:prstDash val="solid"/>
           </a:ln>
         </p:spPr>
+        <p:txBody>
+          <a:bodyPr/>
+          <a:lstStyle/>
+          <a:p>
+            <a:endParaRPr lang="en-US"/>
+          </a:p>
+        </p:txBody>
       </p:sp>
       <p:sp>
         <p:nvSpPr>
@@ -6584,7 +6590,7 @@
           <a:bodyPr wrap="square" lIns="0" tIns="0" rIns="0" bIns="0" rtlCol="0" anchor="t"/>
           <a:lstStyle/>
           <a:p>
-            <a:pPr indent="0" marL="0">
+            <a:pPr marL="0" indent="0">
               <a:buNone/>
             </a:pPr>
             <a:r>
@@ -6620,7 +6626,7 @@
           <a:bodyPr wrap="square" lIns="0" tIns="0" rIns="0" bIns="0" rtlCol="0" anchor="t"/>
           <a:lstStyle/>
           <a:p>
-            <a:pPr indent="0" marL="0">
+            <a:pPr marL="0" indent="0">
               <a:buNone/>
             </a:pPr>
             <a:r>
@@ -6656,7 +6662,7 @@
           <a:bodyPr wrap="square" lIns="0" tIns="0" rIns="0" bIns="0" rtlCol="0" anchor="t"/>
           <a:lstStyle/>
           <a:p>
-            <a:pPr indent="0" marL="0">
+            <a:pPr marL="0" indent="0">
               <a:buNone/>
             </a:pPr>
             <a:r>
@@ -6692,7 +6698,7 @@
           <a:bodyPr wrap="square" lIns="0" tIns="0" rIns="0" bIns="0" rtlCol="0" anchor="t"/>
           <a:lstStyle/>
           <a:p>
-            <a:pPr indent="0" marL="0">
+            <a:pPr marL="0" indent="0">
               <a:buNone/>
             </a:pPr>
             <a:r>
@@ -6728,7 +6734,7 @@
           <a:bodyPr wrap="square" lIns="0" tIns="0" rIns="0" bIns="0" rtlCol="0" anchor="t"/>
           <a:lstStyle/>
           <a:p>
-            <a:pPr indent="0" marL="0">
+            <a:pPr marL="0" indent="0">
               <a:buNone/>
             </a:pPr>
             <a:r>
@@ -6764,7 +6770,7 @@
           <a:bodyPr wrap="square" lIns="0" tIns="0" rIns="0" bIns="0" rtlCol="0" anchor="t"/>
           <a:lstStyle/>
           <a:p>
-            <a:pPr indent="0" marL="0">
+            <a:pPr marL="0" indent="0">
               <a:buNone/>
             </a:pPr>
             <a:r>
@@ -6800,7 +6806,7 @@
           <a:bodyPr wrap="square" lIns="0" tIns="0" rIns="0" bIns="0" rtlCol="0" anchor="t"/>
           <a:lstStyle/>
           <a:p>
-            <a:pPr indent="0" marL="0">
+            <a:pPr marL="0" indent="0">
               <a:buNone/>
             </a:pPr>
             <a:r>
@@ -6836,7 +6842,7 @@
           <a:bodyPr wrap="square" lIns="0" tIns="0" rIns="0" bIns="0" rtlCol="0" anchor="t"/>
           <a:lstStyle/>
           <a:p>
-            <a:pPr algn="r" indent="0" marL="0">
+            <a:pPr marL="0" indent="0" algn="r">
               <a:buNone/>
             </a:pPr>
             <a:r>
@@ -6853,7 +6859,7 @@
       </p:sp>
       <p:sp>
         <p:nvSpPr>
-          <p:cNvPr id="25" name="Slide Number Placeholder 0"/>
+          <p:cNvPr id="26" name="Slide Number Placeholder 0"/>
           <p:cNvSpPr>
             <a:spLocks noGrp="1"/>
           </p:cNvSpPr>
@@ -6871,7 +6877,7 @@
           </a:prstGeom>
           <a:extLst>
             <a:ext uri="{C572A759-6A51-4108-AA02-DFA0A04FC94B}">
-              <ma14:wrappingTextBoxFlag xmlns:ma14="http://schemas.microsoft.com/office/mac/drawingml/2011/main" val="0"/>
+              <ma14:wrappingTextBoxFlag xmlns:ma14="http://schemas.microsoft.com/office/mac/drawingml/2011/main" xmlns="" val="0"/>
             </a:ext>
           </a:extLst>
         </p:spPr>
@@ -6889,7 +6895,7 @@
           <a:p>
             <a:pPr algn="r"/>
             <a:fld id="{F7021451-1387-4CA6-816F-3879F97B5CBC}" type="slidenum">
-              <a:rPr b="0" lang="en-US"/>
+              <a:rPr lang="en-US" b="0"/>
               <a:t>5</a:t>
             </a:fld>
             <a:endParaRPr lang="en-US"/>
@@ -6924,9 +6930,11 @@
       <p:sp>
         <p:nvSpPr>
           <p:cNvPr id="2" name="Text 0"/>
-          <p:cNvSpPr/>
+          <p:cNvSpPr>
+            <a:spLocks noGrp="1"/>
+          </p:cNvSpPr>
           <p:nvPr>
-            <p:ph idx="100" type="body" hasCustomPrompt="1"/>
+            <p:ph type="body" idx="100" hasCustomPrompt="1"/>
           </p:nvPr>
         </p:nvSpPr>
         <p:spPr>
@@ -6944,11 +6952,11 @@
           <a:bodyPr wrap="square" lIns="0" tIns="0" rIns="0" bIns="0" rtlCol="0" anchor="t"/>
           <a:lstStyle/>
           <a:p>
-            <a:pPr algn="l" indent="0" marL="0">
+            <a:pPr marL="0" indent="0" algn="l">
               <a:buNone/>
             </a:pPr>
             <a:r>
-              <a:rPr lang="en-US" sz="1200" b="1" spc="200" kern="0" dirty="0">
+              <a:rPr lang="en-US" sz="1200" b="1" kern="0" spc="200" dirty="0">
                 <a:solidFill>
                   <a:schemeClr val="accent1"/>
                 </a:solidFill>
@@ -6962,9 +6970,11 @@
       <p:sp>
         <p:nvSpPr>
           <p:cNvPr id="3" name="Text 0"/>
-          <p:cNvSpPr/>
+          <p:cNvSpPr>
+            <a:spLocks noGrp="1"/>
+          </p:cNvSpPr>
           <p:nvPr>
-            <p:ph idx="101" type="title" hasCustomPrompt="1"/>
+            <p:ph type="title" idx="101" hasCustomPrompt="1"/>
           </p:nvPr>
         </p:nvSpPr>
         <p:spPr>
@@ -6982,7 +6992,7 @@
           <a:bodyPr wrap="square" lIns="0" tIns="0" rIns="0" bIns="0" rtlCol="0" anchor="t"/>
           <a:lstStyle/>
           <a:p>
-            <a:pPr algn="l" indent="0" marL="0">
+            <a:pPr marL="0" indent="0" algn="l">
               <a:buNone/>
             </a:pPr>
             <a:r>
@@ -7023,6 +7033,13 @@
             <a:prstDash val="solid"/>
           </a:ln>
         </p:spPr>
+        <p:txBody>
+          <a:bodyPr/>
+          <a:lstStyle/>
+          <a:p>
+            <a:endParaRPr lang="en-US"/>
+          </a:p>
+        </p:txBody>
       </p:sp>
       <p:sp>
         <p:nvSpPr>
@@ -7045,7 +7062,7 @@
           <a:bodyPr wrap="square" lIns="0" tIns="0" rIns="0" bIns="0" rtlCol="0" anchor="t"/>
           <a:lstStyle/>
           <a:p>
-            <a:pPr indent="0" marL="0">
+            <a:pPr marL="0" indent="0">
               <a:buNone/>
             </a:pPr>
             <a:r>
@@ -7081,7 +7098,7 @@
           <a:bodyPr wrap="square" lIns="0" tIns="0" rIns="0" bIns="0" rtlCol="0" anchor="t"/>
           <a:lstStyle/>
           <a:p>
-            <a:pPr indent="0" marL="0">
+            <a:pPr marL="0" indent="0">
               <a:buNone/>
             </a:pPr>
             <a:r>
@@ -7117,7 +7134,7 @@
           <a:bodyPr wrap="square" lIns="0" tIns="0" rIns="0" bIns="0" rtlCol="0" anchor="t"/>
           <a:lstStyle/>
           <a:p>
-            <a:pPr indent="0" marL="0">
+            <a:pPr marL="0" indent="0">
               <a:buNone/>
             </a:pPr>
             <a:r>
@@ -7158,6 +7175,13 @@
             <a:prstDash val="solid"/>
           </a:ln>
         </p:spPr>
+        <p:txBody>
+          <a:bodyPr/>
+          <a:lstStyle/>
+          <a:p>
+            <a:endParaRPr lang="en-US"/>
+          </a:p>
+        </p:txBody>
       </p:sp>
       <p:sp>
         <p:nvSpPr>
@@ -7180,7 +7204,7 @@
           <a:bodyPr wrap="square" lIns="0" tIns="0" rIns="0" bIns="0" rtlCol="0" anchor="t"/>
           <a:lstStyle/>
           <a:p>
-            <a:pPr indent="0" marL="0">
+            <a:pPr marL="0" indent="0">
               <a:buNone/>
             </a:pPr>
             <a:r>
@@ -7216,7 +7240,7 @@
           <a:bodyPr wrap="square" lIns="0" tIns="0" rIns="0" bIns="0" rtlCol="0" anchor="t"/>
           <a:lstStyle/>
           <a:p>
-            <a:pPr indent="0" marL="0">
+            <a:pPr marL="0" indent="0">
               <a:buNone/>
             </a:pPr>
             <a:r>
@@ -7252,7 +7276,7 @@
           <a:bodyPr wrap="square" lIns="0" tIns="0" rIns="0" bIns="0" rtlCol="0" anchor="t"/>
           <a:lstStyle/>
           <a:p>
-            <a:pPr indent="0" marL="0">
+            <a:pPr marL="0" indent="0">
               <a:buNone/>
             </a:pPr>
             <a:r>
@@ -7293,6 +7317,13 @@
             <a:prstDash val="solid"/>
           </a:ln>
         </p:spPr>
+        <p:txBody>
+          <a:bodyPr/>
+          <a:lstStyle/>
+          <a:p>
+            <a:endParaRPr lang="en-US"/>
+          </a:p>
+        </p:txBody>
       </p:sp>
       <p:sp>
         <p:nvSpPr>
@@ -7315,7 +7346,7 @@
           <a:bodyPr wrap="square" lIns="0" tIns="0" rIns="0" bIns="0" rtlCol="0" anchor="t"/>
           <a:lstStyle/>
           <a:p>
-            <a:pPr indent="0" marL="0">
+            <a:pPr marL="0" indent="0">
               <a:buNone/>
             </a:pPr>
             <a:r>
@@ -7351,7 +7382,7 @@
           <a:bodyPr wrap="square" lIns="0" tIns="0" rIns="0" bIns="0" rtlCol="0" anchor="t"/>
           <a:lstStyle/>
           <a:p>
-            <a:pPr indent="0" marL="0">
+            <a:pPr marL="0" indent="0">
               <a:buNone/>
             </a:pPr>
             <a:r>
@@ -7387,7 +7418,7 @@
           <a:bodyPr wrap="square" lIns="0" tIns="0" rIns="0" bIns="0" rtlCol="0" anchor="t"/>
           <a:lstStyle/>
           <a:p>
-            <a:pPr indent="0" marL="0">
+            <a:pPr marL="0" indent="0">
               <a:buNone/>
             </a:pPr>
             <a:r>
@@ -7404,7 +7435,7 @@
       </p:sp>
       <p:graphicFrame>
         <p:nvGraphicFramePr>
-          <p:cNvPr id="7" name="Pricing table"/>
+          <p:cNvPr id="16" name="Pricing table"/>
           <p:cNvGraphicFramePr>
             <a:graphicFrameLocks noGrp="1"/>
           </p:cNvGraphicFramePr>
@@ -7425,10 +7456,34 @@
             <a:tbl>
               <a:tblPr/>
               <a:tblGrid>
-                <a:gridCol w="4327855"/>
-                <a:gridCol w="2194560"/>
-                <a:gridCol w="2194560"/>
-                <a:gridCol w="2194560"/>
+                <a:gridCol w="4327855">
+                  <a:extLst>
+                    <a:ext uri="{9D8B030D-6E8A-4147-A177-3AD203B41FA5}">
+                      <a16:colId xmlns:a16="http://schemas.microsoft.com/office/drawing/2014/main" val="20000"/>
+                    </a:ext>
+                  </a:extLst>
+                </a:gridCol>
+                <a:gridCol w="2194560">
+                  <a:extLst>
+                    <a:ext uri="{9D8B030D-6E8A-4147-A177-3AD203B41FA5}">
+                      <a16:colId xmlns:a16="http://schemas.microsoft.com/office/drawing/2014/main" val="20001"/>
+                    </a:ext>
+                  </a:extLst>
+                </a:gridCol>
+                <a:gridCol w="2194560">
+                  <a:extLst>
+                    <a:ext uri="{9D8B030D-6E8A-4147-A177-3AD203B41FA5}">
+                      <a16:colId xmlns:a16="http://schemas.microsoft.com/office/drawing/2014/main" val="20002"/>
+                    </a:ext>
+                  </a:extLst>
+                </a:gridCol>
+                <a:gridCol w="2194560">
+                  <a:extLst>
+                    <a:ext uri="{9D8B030D-6E8A-4147-A177-3AD203B41FA5}">
+                      <a16:colId xmlns:a16="http://schemas.microsoft.com/office/drawing/2014/main" val="20003"/>
+                    </a:ext>
+                  </a:extLst>
+                </a:gridCol>
               </a:tblGrid>
               <a:tr h="384048">
                 <a:tc>
@@ -7436,7 +7491,7 @@
                     <a:bodyPr/>
                     <a:lstStyle/>
                     <a:p>
-                      <a:pPr indent="0" marL="0">
+                      <a:pPr marL="0" indent="0">
                         <a:buNone/>
                       </a:pPr>
                       <a:r>
@@ -7504,7 +7559,7 @@
                     <a:bodyPr/>
                     <a:lstStyle/>
                     <a:p>
-                      <a:pPr indent="0" marL="0">
+                      <a:pPr marL="0" indent="0">
                         <a:buNone/>
                       </a:pPr>
                       <a:r>
@@ -7572,7 +7627,7 @@
                     <a:bodyPr/>
                     <a:lstStyle/>
                     <a:p>
-                      <a:pPr indent="0" marL="0">
+                      <a:pPr marL="0" indent="0">
                         <a:buNone/>
                       </a:pPr>
                       <a:r>
@@ -7640,7 +7695,7 @@
                     <a:bodyPr/>
                     <a:lstStyle/>
                     <a:p>
-                      <a:pPr indent="0" marL="0">
+                      <a:pPr marL="0" indent="0">
                         <a:buNone/>
                       </a:pPr>
                       <a:r>
@@ -7703,6 +7758,11 @@
                     </a:solidFill>
                   </a:tcPr>
                 </a:tc>
+                <a:extLst>
+                  <a:ext uri="{0D108BD9-81ED-4DB2-BD59-A6C34878D82A}">
+                    <a16:rowId xmlns:a16="http://schemas.microsoft.com/office/drawing/2014/main" val="10000"/>
+                  </a:ext>
+                </a:extLst>
               </a:tr>
               <a:tr h="384048">
                 <a:tc>
@@ -7710,7 +7770,7 @@
                     <a:bodyPr/>
                     <a:lstStyle/>
                     <a:p>
-                      <a:pPr indent="0" marL="0">
+                      <a:pPr marL="0" indent="0">
                         <a:buNone/>
                       </a:pPr>
                       <a:r>
@@ -7778,7 +7838,7 @@
                     <a:bodyPr/>
                     <a:lstStyle/>
                     <a:p>
-                      <a:pPr indent="0" marL="0">
+                      <a:pPr marL="0" indent="0">
                         <a:buNone/>
                       </a:pPr>
                       <a:r>
@@ -7846,7 +7906,7 @@
                     <a:bodyPr/>
                     <a:lstStyle/>
                     <a:p>
-                      <a:pPr indent="0" marL="0">
+                      <a:pPr marL="0" indent="0">
                         <a:buNone/>
                       </a:pPr>
                       <a:r>
@@ -7914,7 +7974,7 @@
                     <a:bodyPr/>
                     <a:lstStyle/>
                     <a:p>
-                      <a:pPr indent="0" marL="0">
+                      <a:pPr marL="0" indent="0">
                         <a:buNone/>
                       </a:pPr>
                       <a:r>
@@ -7977,6 +8037,11 @@
                     </a:solidFill>
                   </a:tcPr>
                 </a:tc>
+                <a:extLst>
+                  <a:ext uri="{0D108BD9-81ED-4DB2-BD59-A6C34878D82A}">
+                    <a16:rowId xmlns:a16="http://schemas.microsoft.com/office/drawing/2014/main" val="10001"/>
+                  </a:ext>
+                </a:extLst>
               </a:tr>
               <a:tr h="384048">
                 <a:tc>
@@ -7984,7 +8049,7 @@
                     <a:bodyPr/>
                     <a:lstStyle/>
                     <a:p>
-                      <a:pPr indent="0" marL="0">
+                      <a:pPr marL="0" indent="0">
                         <a:buNone/>
                       </a:pPr>
                       <a:r>
@@ -8052,7 +8117,7 @@
                     <a:bodyPr/>
                     <a:lstStyle/>
                     <a:p>
-                      <a:pPr indent="0" marL="0">
+                      <a:pPr marL="0" indent="0">
                         <a:buNone/>
                       </a:pPr>
                       <a:r>
@@ -8120,7 +8185,7 @@
                     <a:bodyPr/>
                     <a:lstStyle/>
                     <a:p>
-                      <a:pPr indent="0" marL="0">
+                      <a:pPr marL="0" indent="0">
                         <a:buNone/>
                       </a:pPr>
                       <a:r>
@@ -8188,7 +8253,7 @@
                     <a:bodyPr/>
                     <a:lstStyle/>
                     <a:p>
-                      <a:pPr indent="0" marL="0">
+                      <a:pPr marL="0" indent="0">
                         <a:buNone/>
                       </a:pPr>
                       <a:r>
@@ -8251,6 +8316,11 @@
                     </a:solidFill>
                   </a:tcPr>
                 </a:tc>
+                <a:extLst>
+                  <a:ext uri="{0D108BD9-81ED-4DB2-BD59-A6C34878D82A}">
+                    <a16:rowId xmlns:a16="http://schemas.microsoft.com/office/drawing/2014/main" val="10002"/>
+                  </a:ext>
+                </a:extLst>
               </a:tr>
               <a:tr h="384048">
                 <a:tc>
@@ -8258,7 +8328,7 @@
                     <a:bodyPr/>
                     <a:lstStyle/>
                     <a:p>
-                      <a:pPr indent="0" marL="0">
+                      <a:pPr marL="0" indent="0">
                         <a:buNone/>
                       </a:pPr>
                       <a:r>
@@ -8326,7 +8396,7 @@
                     <a:bodyPr/>
                     <a:lstStyle/>
                     <a:p>
-                      <a:pPr indent="0" marL="0">
+                      <a:pPr marL="0" indent="0">
                         <a:buNone/>
                       </a:pPr>
                       <a:r>
@@ -8394,7 +8464,7 @@
                     <a:bodyPr/>
                     <a:lstStyle/>
                     <a:p>
-                      <a:pPr indent="0" marL="0">
+                      <a:pPr marL="0" indent="0">
                         <a:buNone/>
                       </a:pPr>
                       <a:r>
@@ -8462,7 +8532,7 @@
                     <a:bodyPr/>
                     <a:lstStyle/>
                     <a:p>
-                      <a:pPr indent="0" marL="0">
+                      <a:pPr marL="0" indent="0">
                         <a:buNone/>
                       </a:pPr>
                       <a:r>
@@ -8525,6 +8595,11 @@
                     </a:solidFill>
                   </a:tcPr>
                 </a:tc>
+                <a:extLst>
+                  <a:ext uri="{0D108BD9-81ED-4DB2-BD59-A6C34878D82A}">
+                    <a16:rowId xmlns:a16="http://schemas.microsoft.com/office/drawing/2014/main" val="10003"/>
+                  </a:ext>
+                </a:extLst>
               </a:tr>
             </a:tbl>
           </a:graphicData>
@@ -8551,7 +8626,7 @@
           <a:bodyPr wrap="square" lIns="0" tIns="0" rIns="0" bIns="0" rtlCol="0" anchor="t"/>
           <a:lstStyle/>
           <a:p>
-            <a:pPr algn="r" indent="0" marL="0">
+            <a:pPr marL="0" indent="0" algn="r">
               <a:buNone/>
             </a:pPr>
             <a:r>
@@ -8586,7 +8661,7 @@
           </a:prstGeom>
           <a:extLst>
             <a:ext uri="{C572A759-6A51-4108-AA02-DFA0A04FC94B}">
-              <ma14:wrappingTextBoxFlag xmlns:ma14="http://schemas.microsoft.com/office/mac/drawingml/2011/main" val="0"/>
+              <ma14:wrappingTextBoxFlag xmlns:ma14="http://schemas.microsoft.com/office/mac/drawingml/2011/main" xmlns="" val="0"/>
             </a:ext>
           </a:extLst>
         </p:spPr>
@@ -8604,7 +8679,7 @@
           <a:p>
             <a:pPr algn="r"/>
             <a:fld id="{F7021451-1387-4CA6-816F-3879F97B5CBC}" type="slidenum">
-              <a:rPr b="0" lang="en-US"/>
+              <a:rPr lang="en-US" b="0"/>
               <a:t>6</a:t>
             </a:fld>
             <a:endParaRPr lang="en-US"/>
@@ -8639,9 +8714,11 @@
       <p:sp>
         <p:nvSpPr>
           <p:cNvPr id="2" name="Text 0"/>
-          <p:cNvSpPr/>
+          <p:cNvSpPr>
+            <a:spLocks noGrp="1"/>
+          </p:cNvSpPr>
           <p:nvPr>
-            <p:ph idx="100" type="body" hasCustomPrompt="1"/>
+            <p:ph type="body" idx="100" hasCustomPrompt="1"/>
           </p:nvPr>
         </p:nvSpPr>
         <p:spPr>
@@ -8659,11 +8736,11 @@
           <a:bodyPr wrap="square" lIns="0" tIns="0" rIns="0" bIns="0" rtlCol="0" anchor="t"/>
           <a:lstStyle/>
           <a:p>
-            <a:pPr algn="l" indent="0" marL="0">
+            <a:pPr marL="0" indent="0" algn="l">
               <a:buNone/>
             </a:pPr>
             <a:r>
-              <a:rPr lang="en-US" sz="1200" b="1" spc="200" kern="0" dirty="0">
+              <a:rPr lang="en-US" sz="1200" b="1" kern="0" spc="200" dirty="0">
                 <a:solidFill>
                   <a:schemeClr val="accent1"/>
                 </a:solidFill>
@@ -8677,9 +8754,11 @@
       <p:sp>
         <p:nvSpPr>
           <p:cNvPr id="3" name="Text 0"/>
-          <p:cNvSpPr/>
+          <p:cNvSpPr>
+            <a:spLocks noGrp="1"/>
+          </p:cNvSpPr>
           <p:nvPr>
-            <p:ph idx="101" type="title" hasCustomPrompt="1"/>
+            <p:ph type="title" idx="101" hasCustomPrompt="1"/>
           </p:nvPr>
         </p:nvSpPr>
         <p:spPr>
@@ -8697,7 +8776,7 @@
           <a:bodyPr wrap="square" lIns="0" tIns="0" rIns="0" bIns="0" rtlCol="0" anchor="t"/>
           <a:lstStyle/>
           <a:p>
-            <a:pPr algn="l" indent="0" marL="0">
+            <a:pPr marL="0" indent="0" algn="l">
               <a:buNone/>
             </a:pPr>
             <a:r>
@@ -8733,7 +8812,7 @@
           <a:bodyPr wrap="square" lIns="0" tIns="0" rIns="0" bIns="0" rtlCol="0" anchor="t"/>
           <a:lstStyle/>
           <a:p>
-            <a:pPr indent="0" marL="0">
+            <a:pPr marL="0" indent="0">
               <a:buNone/>
             </a:pPr>
             <a:r>
@@ -8744,9 +8823,6 @@
               </a:rPr>
               <a:t>Task: </a:t>
             </a:r>
-            <a:pPr indent="0" marL="0">
-              <a:buNone/>
-            </a:pPr>
             <a:r>
               <a:rPr lang="en-US" sz="1600" dirty="0">
                 <a:solidFill>
@@ -8782,11 +8858,41 @@
             <a:tbl>
               <a:tblPr/>
               <a:tblGrid>
-                <a:gridCol w="3047695"/>
-                <a:gridCol w="1737360"/>
-                <a:gridCol w="1737360"/>
-                <a:gridCol w="1737360"/>
-                <a:gridCol w="2651760"/>
+                <a:gridCol w="3047695">
+                  <a:extLst>
+                    <a:ext uri="{9D8B030D-6E8A-4147-A177-3AD203B41FA5}">
+                      <a16:colId xmlns:a16="http://schemas.microsoft.com/office/drawing/2014/main" val="20000"/>
+                    </a:ext>
+                  </a:extLst>
+                </a:gridCol>
+                <a:gridCol w="1737360">
+                  <a:extLst>
+                    <a:ext uri="{9D8B030D-6E8A-4147-A177-3AD203B41FA5}">
+                      <a16:colId xmlns:a16="http://schemas.microsoft.com/office/drawing/2014/main" val="20001"/>
+                    </a:ext>
+                  </a:extLst>
+                </a:gridCol>
+                <a:gridCol w="1737360">
+                  <a:extLst>
+                    <a:ext uri="{9D8B030D-6E8A-4147-A177-3AD203B41FA5}">
+                      <a16:colId xmlns:a16="http://schemas.microsoft.com/office/drawing/2014/main" val="20002"/>
+                    </a:ext>
+                  </a:extLst>
+                </a:gridCol>
+                <a:gridCol w="1737360">
+                  <a:extLst>
+                    <a:ext uri="{9D8B030D-6E8A-4147-A177-3AD203B41FA5}">
+                      <a16:colId xmlns:a16="http://schemas.microsoft.com/office/drawing/2014/main" val="20003"/>
+                    </a:ext>
+                  </a:extLst>
+                </a:gridCol>
+                <a:gridCol w="2651760">
+                  <a:extLst>
+                    <a:ext uri="{9D8B030D-6E8A-4147-A177-3AD203B41FA5}">
+                      <a16:colId xmlns:a16="http://schemas.microsoft.com/office/drawing/2014/main" val="20004"/>
+                    </a:ext>
+                  </a:extLst>
+                </a:gridCol>
               </a:tblGrid>
               <a:tr h="384048">
                 <a:tc>
@@ -8794,7 +8900,7 @@
                     <a:bodyPr/>
                     <a:lstStyle/>
                     <a:p>
-                      <a:pPr indent="0" marL="0">
+                      <a:pPr marL="0" indent="0">
                         <a:buNone/>
                       </a:pPr>
                       <a:r>
@@ -8862,7 +8968,7 @@
                     <a:bodyPr/>
                     <a:lstStyle/>
                     <a:p>
-                      <a:pPr indent="0" marL="0">
+                      <a:pPr marL="0" indent="0">
                         <a:buNone/>
                       </a:pPr>
                       <a:r>
@@ -8930,7 +9036,7 @@
                     <a:bodyPr/>
                     <a:lstStyle/>
                     <a:p>
-                      <a:pPr indent="0" marL="0">
+                      <a:pPr marL="0" indent="0">
                         <a:buNone/>
                       </a:pPr>
                       <a:r>
@@ -8998,7 +9104,7 @@
                     <a:bodyPr/>
                     <a:lstStyle/>
                     <a:p>
-                      <a:pPr indent="0" marL="0">
+                      <a:pPr marL="0" indent="0">
                         <a:buNone/>
                       </a:pPr>
                       <a:r>
@@ -9066,7 +9172,7 @@
                     <a:bodyPr/>
                     <a:lstStyle/>
                     <a:p>
-                      <a:pPr indent="0" marL="0">
+                      <a:pPr marL="0" indent="0">
                         <a:buNone/>
                       </a:pPr>
                       <a:r>
@@ -9129,6 +9235,11 @@
                     </a:solidFill>
                   </a:tcPr>
                 </a:tc>
+                <a:extLst>
+                  <a:ext uri="{0D108BD9-81ED-4DB2-BD59-A6C34878D82A}">
+                    <a16:rowId xmlns:a16="http://schemas.microsoft.com/office/drawing/2014/main" val="10000"/>
+                  </a:ext>
+                </a:extLst>
               </a:tr>
               <a:tr h="384048">
                 <a:tc>
@@ -9136,7 +9247,7 @@
                     <a:bodyPr/>
                     <a:lstStyle/>
                     <a:p>
-                      <a:pPr indent="0" marL="0">
+                      <a:pPr marL="0" indent="0">
                         <a:buNone/>
                       </a:pPr>
                       <a:r>
@@ -9204,7 +9315,7 @@
                     <a:bodyPr/>
                     <a:lstStyle/>
                     <a:p>
-                      <a:pPr indent="0" marL="0">
+                      <a:pPr marL="0" indent="0">
                         <a:buNone/>
                       </a:pPr>
                       <a:r>
@@ -9272,7 +9383,7 @@
                     <a:bodyPr/>
                     <a:lstStyle/>
                     <a:p>
-                      <a:pPr indent="0" marL="0">
+                      <a:pPr marL="0" indent="0">
                         <a:buNone/>
                       </a:pPr>
                       <a:r>
@@ -9340,7 +9451,7 @@
                     <a:bodyPr/>
                     <a:lstStyle/>
                     <a:p>
-                      <a:pPr indent="0" marL="0">
+                      <a:pPr marL="0" indent="0">
                         <a:buNone/>
                       </a:pPr>
                       <a:r>
@@ -9408,7 +9519,7 @@
                     <a:bodyPr/>
                     <a:lstStyle/>
                     <a:p>
-                      <a:pPr indent="0" marL="0">
+                      <a:pPr marL="0" indent="0">
                         <a:buNone/>
                       </a:pPr>
                       <a:r>
@@ -9471,6 +9582,11 @@
                     </a:solidFill>
                   </a:tcPr>
                 </a:tc>
+                <a:extLst>
+                  <a:ext uri="{0D108BD9-81ED-4DB2-BD59-A6C34878D82A}">
+                    <a16:rowId xmlns:a16="http://schemas.microsoft.com/office/drawing/2014/main" val="10001"/>
+                  </a:ext>
+                </a:extLst>
               </a:tr>
               <a:tr h="384048">
                 <a:tc>
@@ -9478,7 +9594,7 @@
                     <a:bodyPr/>
                     <a:lstStyle/>
                     <a:p>
-                      <a:pPr indent="0" marL="0">
+                      <a:pPr marL="0" indent="0">
                         <a:buNone/>
                       </a:pPr>
                       <a:r>
@@ -9546,7 +9662,7 @@
                     <a:bodyPr/>
                     <a:lstStyle/>
                     <a:p>
-                      <a:pPr indent="0" marL="0">
+                      <a:pPr marL="0" indent="0">
                         <a:buNone/>
                       </a:pPr>
                       <a:r>
@@ -9614,7 +9730,7 @@
                     <a:bodyPr/>
                     <a:lstStyle/>
                     <a:p>
-                      <a:pPr indent="0" marL="0">
+                      <a:pPr marL="0" indent="0">
                         <a:buNone/>
                       </a:pPr>
                       <a:r>
@@ -9682,7 +9798,7 @@
                     <a:bodyPr/>
                     <a:lstStyle/>
                     <a:p>
-                      <a:pPr indent="0" marL="0">
+                      <a:pPr marL="0" indent="0">
                         <a:buNone/>
                       </a:pPr>
                       <a:r>
@@ -9750,7 +9866,7 @@
                     <a:bodyPr/>
                     <a:lstStyle/>
                     <a:p>
-                      <a:pPr indent="0" marL="0">
+                      <a:pPr marL="0" indent="0">
                         <a:buNone/>
                       </a:pPr>
                       <a:r>
@@ -9813,6 +9929,11 @@
                     </a:solidFill>
                   </a:tcPr>
                 </a:tc>
+                <a:extLst>
+                  <a:ext uri="{0D108BD9-81ED-4DB2-BD59-A6C34878D82A}">
+                    <a16:rowId xmlns:a16="http://schemas.microsoft.com/office/drawing/2014/main" val="10002"/>
+                  </a:ext>
+                </a:extLst>
               </a:tr>
               <a:tr h="384048">
                 <a:tc>
@@ -9820,7 +9941,7 @@
                     <a:bodyPr/>
                     <a:lstStyle/>
                     <a:p>
-                      <a:pPr indent="0" marL="0">
+                      <a:pPr marL="0" indent="0">
                         <a:buNone/>
                       </a:pPr>
                       <a:r>
@@ -9888,7 +10009,7 @@
                     <a:bodyPr/>
                     <a:lstStyle/>
                     <a:p>
-                      <a:pPr indent="0" marL="0">
+                      <a:pPr marL="0" indent="0">
                         <a:buNone/>
                       </a:pPr>
                       <a:r>
@@ -9956,7 +10077,7 @@
                     <a:bodyPr/>
                     <a:lstStyle/>
                     <a:p>
-                      <a:pPr indent="0" marL="0">
+                      <a:pPr marL="0" indent="0">
                         <a:buNone/>
                       </a:pPr>
                       <a:r>
@@ -10024,7 +10145,7 @@
                     <a:bodyPr/>
                     <a:lstStyle/>
                     <a:p>
-                      <a:pPr indent="0" marL="0">
+                      <a:pPr marL="0" indent="0">
                         <a:buNone/>
                       </a:pPr>
                       <a:r>
@@ -10092,7 +10213,7 @@
                     <a:bodyPr/>
                     <a:lstStyle/>
                     <a:p>
-                      <a:pPr indent="0" marL="0">
+                      <a:pPr marL="0" indent="0">
                         <a:buNone/>
                       </a:pPr>
                       <a:r>
@@ -10155,6 +10276,11 @@
                     </a:solidFill>
                   </a:tcPr>
                 </a:tc>
+                <a:extLst>
+                  <a:ext uri="{0D108BD9-81ED-4DB2-BD59-A6C34878D82A}">
+                    <a16:rowId xmlns:a16="http://schemas.microsoft.com/office/drawing/2014/main" val="10003"/>
+                  </a:ext>
+                </a:extLst>
               </a:tr>
               <a:tr h="384048">
                 <a:tc>
@@ -10162,7 +10288,7 @@
                     <a:bodyPr/>
                     <a:lstStyle/>
                     <a:p>
-                      <a:pPr indent="0" marL="0">
+                      <a:pPr marL="0" indent="0">
                         <a:buNone/>
                       </a:pPr>
                       <a:r>
@@ -10230,7 +10356,7 @@
                     <a:bodyPr/>
                     <a:lstStyle/>
                     <a:p>
-                      <a:pPr indent="0" marL="0">
+                      <a:pPr marL="0" indent="0">
                         <a:buNone/>
                       </a:pPr>
                       <a:r>
@@ -10298,7 +10424,7 @@
                     <a:bodyPr/>
                     <a:lstStyle/>
                     <a:p>
-                      <a:pPr indent="0" marL="0">
+                      <a:pPr marL="0" indent="0">
                         <a:buNone/>
                       </a:pPr>
                       <a:r>
@@ -10366,7 +10492,7 @@
                     <a:bodyPr/>
                     <a:lstStyle/>
                     <a:p>
-                      <a:pPr indent="0" marL="0">
+                      <a:pPr marL="0" indent="0">
                         <a:buNone/>
                       </a:pPr>
                       <a:r>
@@ -10434,7 +10560,7 @@
                     <a:bodyPr/>
                     <a:lstStyle/>
                     <a:p>
-                      <a:pPr indent="0" marL="0">
+                      <a:pPr marL="0" indent="0">
                         <a:buNone/>
                       </a:pPr>
                       <a:r>
@@ -10497,6 +10623,11 @@
                     </a:solidFill>
                   </a:tcPr>
                 </a:tc>
+                <a:extLst>
+                  <a:ext uri="{0D108BD9-81ED-4DB2-BD59-A6C34878D82A}">
+                    <a16:rowId xmlns:a16="http://schemas.microsoft.com/office/drawing/2014/main" val="10004"/>
+                  </a:ext>
+                </a:extLst>
               </a:tr>
             </a:tbl>
           </a:graphicData>
@@ -10528,6 +10659,13 @@
             <a:prstDash val="dash"/>
           </a:ln>
         </p:spPr>
+        <p:txBody>
+          <a:bodyPr/>
+          <a:lstStyle/>
+          <a:p>
+            <a:endParaRPr lang="en-US"/>
+          </a:p>
+        </p:txBody>
       </p:sp>
       <p:sp>
         <p:nvSpPr>
@@ -10550,7 +10688,7 @@
           <a:bodyPr wrap="square" lIns="0" tIns="0" rIns="0" bIns="0" rtlCol="0" anchor="ctr"/>
           <a:lstStyle/>
           <a:p>
-            <a:pPr algn="ctr" indent="0" marL="0">
+            <a:pPr marL="0" indent="0" algn="ctr">
               <a:buNone/>
             </a:pPr>
             <a:r>
@@ -10567,7 +10705,7 @@
       </p:sp>
       <p:sp>
         <p:nvSpPr>
-          <p:cNvPr id="8" name="Text 5"/>
+          <p:cNvPr id="5" name="Text 5"/>
           <p:cNvSpPr txBox="1"/>
           <p:nvPr/>
         </p:nvSpPr>
@@ -10586,7 +10724,7 @@
           <a:bodyPr wrap="square" lIns="0" tIns="0" rIns="0" bIns="0" rtlCol="0" anchor="t"/>
           <a:lstStyle/>
           <a:p>
-            <a:pPr algn="r" indent="0" marL="0">
+            <a:pPr marL="0" indent="0" algn="r">
               <a:buNone/>
             </a:pPr>
             <a:r>
@@ -10621,7 +10759,7 @@
           </a:prstGeom>
           <a:extLst>
             <a:ext uri="{C572A759-6A51-4108-AA02-DFA0A04FC94B}">
-              <ma14:wrappingTextBoxFlag xmlns:ma14="http://schemas.microsoft.com/office/mac/drawingml/2011/main" val="0"/>
+              <ma14:wrappingTextBoxFlag xmlns:ma14="http://schemas.microsoft.com/office/mac/drawingml/2011/main" xmlns="" val="0"/>
             </a:ext>
           </a:extLst>
         </p:spPr>
@@ -10639,7 +10777,7 @@
           <a:p>
             <a:pPr algn="r"/>
             <a:fld id="{F7021451-1387-4CA6-816F-3879F97B5CBC}" type="slidenum">
-              <a:rPr b="0" lang="en-US"/>
+              <a:rPr lang="en-US" b="0"/>
               <a:t>7</a:t>
             </a:fld>
             <a:endParaRPr lang="en-US"/>
@@ -10674,9 +10812,11 @@
       <p:sp>
         <p:nvSpPr>
           <p:cNvPr id="2" name="Text 0"/>
-          <p:cNvSpPr/>
+          <p:cNvSpPr>
+            <a:spLocks noGrp="1"/>
+          </p:cNvSpPr>
           <p:nvPr>
-            <p:ph idx="100" type="body" hasCustomPrompt="1"/>
+            <p:ph type="body" idx="100" hasCustomPrompt="1"/>
           </p:nvPr>
         </p:nvSpPr>
         <p:spPr>
@@ -10694,11 +10834,11 @@
           <a:bodyPr wrap="square" lIns="0" tIns="0" rIns="0" bIns="0" rtlCol="0" anchor="t"/>
           <a:lstStyle/>
           <a:p>
-            <a:pPr algn="l" indent="0" marL="0">
+            <a:pPr marL="0" indent="0" algn="l">
               <a:buNone/>
             </a:pPr>
             <a:r>
-              <a:rPr lang="en-US" sz="1200" b="1" spc="200" kern="0" dirty="0">
+              <a:rPr lang="en-US" sz="1200" b="1" kern="0" spc="200" dirty="0">
                 <a:solidFill>
                   <a:schemeClr val="accent3"/>
                 </a:solidFill>
@@ -10712,9 +10852,11 @@
       <p:sp>
         <p:nvSpPr>
           <p:cNvPr id="3" name="Text 0"/>
-          <p:cNvSpPr/>
+          <p:cNvSpPr>
+            <a:spLocks noGrp="1"/>
+          </p:cNvSpPr>
           <p:nvPr>
-            <p:ph idx="101" type="title" hasCustomPrompt="1"/>
+            <p:ph type="title" idx="101" hasCustomPrompt="1"/>
           </p:nvPr>
         </p:nvSpPr>
         <p:spPr>
@@ -10732,7 +10874,7 @@
           <a:bodyPr wrap="square" lIns="0" tIns="0" rIns="0" bIns="0" rtlCol="0" anchor="t"/>
           <a:lstStyle/>
           <a:p>
-            <a:pPr algn="l" indent="0" marL="0">
+            <a:pPr marL="0" indent="0" algn="l">
               <a:buNone/>
             </a:pPr>
             <a:r>
@@ -10773,6 +10915,13 @@
             <a:prstDash val="solid"/>
           </a:ln>
         </p:spPr>
+        <p:txBody>
+          <a:bodyPr/>
+          <a:lstStyle/>
+          <a:p>
+            <a:endParaRPr lang="en-US"/>
+          </a:p>
+        </p:txBody>
       </p:sp>
       <p:sp>
         <p:nvSpPr>
@@ -10795,7 +10944,7 @@
           <a:bodyPr wrap="square" lIns="0" tIns="0" rIns="0" bIns="0" rtlCol="0" anchor="t"/>
           <a:lstStyle/>
           <a:p>
-            <a:pPr indent="0" marL="0">
+            <a:pPr marL="0" indent="0">
               <a:buNone/>
             </a:pPr>
             <a:r>
@@ -10831,7 +10980,7 @@
           <a:bodyPr wrap="square" lIns="0" tIns="0" rIns="0" bIns="0" rtlCol="0" anchor="t"/>
           <a:lstStyle/>
           <a:p>
-            <a:pPr indent="0" marL="0">
+            <a:pPr marL="0" indent="0">
               <a:buNone/>
             </a:pPr>
             <a:r>
@@ -10872,6 +11021,13 @@
             <a:prstDash val="solid"/>
           </a:ln>
         </p:spPr>
+        <p:txBody>
+          <a:bodyPr/>
+          <a:lstStyle/>
+          <a:p>
+            <a:endParaRPr lang="en-US"/>
+          </a:p>
+        </p:txBody>
       </p:sp>
       <p:sp>
         <p:nvSpPr>
@@ -10894,7 +11050,7 @@
           <a:bodyPr wrap="square" lIns="0" tIns="0" rIns="0" bIns="0" rtlCol="0" anchor="t"/>
           <a:lstStyle/>
           <a:p>
-            <a:pPr indent="0" marL="0">
+            <a:pPr marL="0" indent="0">
               <a:buNone/>
             </a:pPr>
             <a:r>
@@ -10930,7 +11086,7 @@
           <a:bodyPr wrap="square" lIns="0" tIns="0" rIns="0" bIns="0" rtlCol="0" anchor="t"/>
           <a:lstStyle/>
           <a:p>
-            <a:pPr indent="0" marL="0">
+            <a:pPr marL="0" indent="0">
               <a:buNone/>
             </a:pPr>
             <a:r>
@@ -10971,6 +11127,13 @@
             <a:prstDash val="solid"/>
           </a:ln>
         </p:spPr>
+        <p:txBody>
+          <a:bodyPr/>
+          <a:lstStyle/>
+          <a:p>
+            <a:endParaRPr lang="en-US"/>
+          </a:p>
+        </p:txBody>
       </p:sp>
       <p:sp>
         <p:nvSpPr>
@@ -10993,7 +11156,7 @@
           <a:bodyPr wrap="square" lIns="0" tIns="0" rIns="0" bIns="0" rtlCol="0" anchor="t"/>
           <a:lstStyle/>
           <a:p>
-            <a:pPr indent="0" marL="0">
+            <a:pPr marL="0" indent="0">
               <a:buNone/>
             </a:pPr>
             <a:r>
@@ -11029,7 +11192,7 @@
           <a:bodyPr wrap="square" lIns="0" tIns="0" rIns="0" bIns="0" rtlCol="0" anchor="t"/>
           <a:lstStyle/>
           <a:p>
-            <a:pPr indent="0" marL="0">
+            <a:pPr marL="0" indent="0">
               <a:buNone/>
             </a:pPr>
             <a:r>
@@ -11065,7 +11228,7 @@
           <a:bodyPr wrap="square" lIns="0" tIns="0" rIns="0" bIns="0" rtlCol="0" anchor="t"/>
           <a:lstStyle/>
           <a:p>
-            <a:pPr indent="0" marL="0">
+            <a:pPr marL="0" indent="0">
               <a:buNone/>
             </a:pPr>
             <a:r>
@@ -11101,7 +11264,7 @@
           <a:bodyPr wrap="square" lIns="0" tIns="0" rIns="0" bIns="0" rtlCol="0" anchor="t"/>
           <a:lstStyle/>
           <a:p>
-            <a:pPr indent="0" marL="0">
+            <a:pPr marL="0" indent="0">
               <a:buNone/>
             </a:pPr>
             <a:r>
@@ -11417,4 +11580,319 @@
     </a:ext>
   </a:extLst>
 </a:theme>
+</file>
+
+<file path=ppt/theme/theme2.xml><?xml version="1.0" encoding="utf-8"?>
+<a:theme xmlns:a="http://schemas.openxmlformats.org/drawingml/2006/main" name="Office Theme">
+  <a:themeElements>
+    <a:clrScheme name="Office">
+      <a:dk1>
+        <a:sysClr val="windowText" lastClr="000000"/>
+      </a:dk1>
+      <a:lt1>
+        <a:sysClr val="window" lastClr="FFFFFF"/>
+      </a:lt1>
+      <a:dk2>
+        <a:srgbClr val="0E2841"/>
+      </a:dk2>
+      <a:lt2>
+        <a:srgbClr val="E8E8E8"/>
+      </a:lt2>
+      <a:accent1>
+        <a:srgbClr val="156082"/>
+      </a:accent1>
+      <a:accent2>
+        <a:srgbClr val="E97132"/>
+      </a:accent2>
+      <a:accent3>
+        <a:srgbClr val="196B24"/>
+      </a:accent3>
+      <a:accent4>
+        <a:srgbClr val="0F9ED5"/>
+      </a:accent4>
+      <a:accent5>
+        <a:srgbClr val="A02B93"/>
+      </a:accent5>
+      <a:accent6>
+        <a:srgbClr val="4EA72E"/>
+      </a:accent6>
+      <a:hlink>
+        <a:srgbClr val="467886"/>
+      </a:hlink>
+      <a:folHlink>
+        <a:srgbClr val="96607D"/>
+      </a:folHlink>
+    </a:clrScheme>
+    <a:fontScheme name="Office">
+      <a:majorFont>
+        <a:latin typeface="Aptos Display" panose="02110004020202020204"/>
+        <a:ea typeface=""/>
+        <a:cs typeface=""/>
+        <a:font script="Jpan" typeface="游ゴシック Light"/>
+        <a:font script="Hang" typeface="맑은 고딕"/>
+        <a:font script="Hans" typeface="等线 Light"/>
+        <a:font script="Hant" typeface="新細明體"/>
+        <a:font script="Arab" typeface="Times New Roman"/>
+        <a:font script="Hebr" typeface="Times New Roman"/>
+        <a:font script="Thai" typeface="Angsana New"/>
+        <a:font script="Ethi" typeface="Nyala"/>
+        <a:font script="Beng" typeface="Vrinda"/>
+        <a:font script="Gujr" typeface="Shruti"/>
+        <a:font script="Khmr" typeface="MoolBoran"/>
+        <a:font script="Knda" typeface="Tunga"/>
+        <a:font script="Guru" typeface="Raavi"/>
+        <a:font script="Cans" typeface="Euphemia"/>
+        <a:font script="Cher" typeface="Plantagenet Cherokee"/>
+        <a:font script="Yiii" typeface="Microsoft Yi Baiti"/>
+        <a:font script="Tibt" typeface="Microsoft Himalaya"/>
+        <a:font script="Thaa" typeface="MV Boli"/>
+        <a:font script="Deva" typeface="Mangal"/>
+        <a:font script="Telu" typeface="Gautami"/>
+        <a:font script="Taml" typeface="Latha"/>
+        <a:font script="Syrc" typeface="Estrangelo Edessa"/>
+        <a:font script="Orya" typeface="Kalinga"/>
+        <a:font script="Mlym" typeface="Kartika"/>
+        <a:font script="Laoo" typeface="DokChampa"/>
+        <a:font script="Sinh" typeface="Iskoola Pota"/>
+        <a:font script="Mong" typeface="Mongolian Baiti"/>
+        <a:font script="Viet" typeface="Times New Roman"/>
+        <a:font script="Uigh" typeface="Microsoft Uighur"/>
+        <a:font script="Geor" typeface="Sylfaen"/>
+        <a:font script="Armn" typeface="Arial"/>
+        <a:font script="Bugi" typeface="Leelawadee UI"/>
+        <a:font script="Bopo" typeface="Microsoft JhengHei"/>
+        <a:font script="Java" typeface="Javanese Text"/>
+        <a:font script="Lisu" typeface="Segoe UI"/>
+        <a:font script="Mymr" typeface="Myanmar Text"/>
+        <a:font script="Nkoo" typeface="Ebrima"/>
+        <a:font script="Olck" typeface="Nirmala UI"/>
+        <a:font script="Osma" typeface="Ebrima"/>
+        <a:font script="Phag" typeface="Phagspa"/>
+        <a:font script="Syrn" typeface="Estrangelo Edessa"/>
+        <a:font script="Syrj" typeface="Estrangelo Edessa"/>
+        <a:font script="Syre" typeface="Estrangelo Edessa"/>
+        <a:font script="Sora" typeface="Nirmala UI"/>
+        <a:font script="Tale" typeface="Microsoft Tai Le"/>
+        <a:font script="Talu" typeface="Microsoft New Tai Lue"/>
+        <a:font script="Tfng" typeface="Ebrima"/>
+      </a:majorFont>
+      <a:minorFont>
+        <a:latin typeface="Aptos" panose="02110004020202020204"/>
+        <a:ea typeface=""/>
+        <a:cs typeface=""/>
+        <a:font script="Jpan" typeface="游ゴシック"/>
+        <a:font script="Hang" typeface="맑은 고딕"/>
+        <a:font script="Hans" typeface="等线"/>
+        <a:font script="Hant" typeface="新細明體"/>
+        <a:font script="Arab" typeface="Arial"/>
+        <a:font script="Hebr" typeface="Arial"/>
+        <a:font script="Thai" typeface="Cordia New"/>
+        <a:font script="Ethi" typeface="Nyala"/>
+        <a:font script="Beng" typeface="Vrinda"/>
+        <a:font script="Gujr" typeface="Shruti"/>
+        <a:font script="Khmr" typeface="DaunPenh"/>
+        <a:font script="Knda" typeface="Tunga"/>
+        <a:font script="Guru" typeface="Raavi"/>
+        <a:font script="Cans" typeface="Euphemia"/>
+        <a:font script="Cher" typeface="Plantagenet Cherokee"/>
+        <a:font script="Yiii" typeface="Microsoft Yi Baiti"/>
+        <a:font script="Tibt" typeface="Microsoft Himalaya"/>
+        <a:font script="Thaa" typeface="MV Boli"/>
+        <a:font script="Deva" typeface="Mangal"/>
+        <a:font script="Telu" typeface="Gautami"/>
+        <a:font script="Taml" typeface="Latha"/>
+        <a:font script="Syrc" typeface="Estrangelo Edessa"/>
+        <a:font script="Orya" typeface="Kalinga"/>
+        <a:font script="Mlym" typeface="Kartika"/>
+        <a:font script="Laoo" typeface="DokChampa"/>
+        <a:font script="Sinh" typeface="Iskoola Pota"/>
+        <a:font script="Mong" typeface="Mongolian Baiti"/>
+        <a:font script="Viet" typeface="Arial"/>
+        <a:font script="Uigh" typeface="Microsoft Uighur"/>
+        <a:font script="Geor" typeface="Sylfaen"/>
+        <a:font script="Armn" typeface="Arial"/>
+        <a:font script="Bugi" typeface="Leelawadee UI"/>
+        <a:font script="Bopo" typeface="Microsoft JhengHei"/>
+        <a:font script="Java" typeface="Javanese Text"/>
+        <a:font script="Lisu" typeface="Segoe UI"/>
+        <a:font script="Mymr" typeface="Myanmar Text"/>
+        <a:font script="Nkoo" typeface="Ebrima"/>
+        <a:font script="Olck" typeface="Nirmala UI"/>
+        <a:font script="Osma" typeface="Ebrima"/>
+        <a:font script="Phag" typeface="Phagspa"/>
+        <a:font script="Syrn" typeface="Estrangelo Edessa"/>
+        <a:font script="Syrj" typeface="Estrangelo Edessa"/>
+        <a:font script="Syre" typeface="Estrangelo Edessa"/>
+        <a:font script="Sora" typeface="Nirmala UI"/>
+        <a:font script="Tale" typeface="Microsoft Tai Le"/>
+        <a:font script="Talu" typeface="Microsoft New Tai Lue"/>
+        <a:font script="Tfng" typeface="Ebrima"/>
+      </a:minorFont>
+    </a:fontScheme>
+    <a:fmtScheme name="Office">
+      <a:fillStyleLst>
+        <a:solidFill>
+          <a:schemeClr val="phClr"/>
+        </a:solidFill>
+        <a:gradFill rotWithShape="1">
+          <a:gsLst>
+            <a:gs pos="0">
+              <a:schemeClr val="phClr">
+                <a:lumMod val="110000"/>
+                <a:satMod val="105000"/>
+                <a:tint val="67000"/>
+              </a:schemeClr>
+            </a:gs>
+            <a:gs pos="50000">
+              <a:schemeClr val="phClr">
+                <a:lumMod val="105000"/>
+                <a:satMod val="103000"/>
+                <a:tint val="73000"/>
+              </a:schemeClr>
+            </a:gs>
+            <a:gs pos="100000">
+              <a:schemeClr val="phClr">
+                <a:lumMod val="105000"/>
+                <a:satMod val="109000"/>
+                <a:tint val="81000"/>
+              </a:schemeClr>
+            </a:gs>
+          </a:gsLst>
+          <a:lin ang="5400000" scaled="0"/>
+        </a:gradFill>
+        <a:gradFill rotWithShape="1">
+          <a:gsLst>
+            <a:gs pos="0">
+              <a:schemeClr val="phClr">
+                <a:satMod val="103000"/>
+                <a:lumMod val="102000"/>
+                <a:tint val="94000"/>
+              </a:schemeClr>
+            </a:gs>
+            <a:gs pos="50000">
+              <a:schemeClr val="phClr">
+                <a:satMod val="110000"/>
+                <a:lumMod val="100000"/>
+                <a:shade val="100000"/>
+              </a:schemeClr>
+            </a:gs>
+            <a:gs pos="100000">
+              <a:schemeClr val="phClr">
+                <a:lumMod val="99000"/>
+                <a:satMod val="120000"/>
+                <a:shade val="78000"/>
+              </a:schemeClr>
+            </a:gs>
+          </a:gsLst>
+          <a:lin ang="5400000" scaled="0"/>
+        </a:gradFill>
+      </a:fillStyleLst>
+      <a:lnStyleLst>
+        <a:ln w="12700" cap="flat" cmpd="sng" algn="ctr">
+          <a:solidFill>
+            <a:schemeClr val="phClr"/>
+          </a:solidFill>
+          <a:prstDash val="solid"/>
+          <a:miter lim="800000"/>
+        </a:ln>
+        <a:ln w="19050" cap="flat" cmpd="sng" algn="ctr">
+          <a:solidFill>
+            <a:schemeClr val="phClr"/>
+          </a:solidFill>
+          <a:prstDash val="solid"/>
+          <a:miter lim="800000"/>
+        </a:ln>
+        <a:ln w="25400" cap="flat" cmpd="sng" algn="ctr">
+          <a:solidFill>
+            <a:schemeClr val="phClr"/>
+          </a:solidFill>
+          <a:prstDash val="solid"/>
+          <a:miter lim="800000"/>
+        </a:ln>
+      </a:lnStyleLst>
+      <a:effectStyleLst>
+        <a:effectStyle>
+          <a:effectLst/>
+        </a:effectStyle>
+        <a:effectStyle>
+          <a:effectLst/>
+        </a:effectStyle>
+        <a:effectStyle>
+          <a:effectLst>
+            <a:outerShdw blurRad="57150" dist="19050" dir="5400000" algn="ctr" rotWithShape="0">
+              <a:srgbClr val="000000">
+                <a:alpha val="63000"/>
+              </a:srgbClr>
+            </a:outerShdw>
+          </a:effectLst>
+        </a:effectStyle>
+      </a:effectStyleLst>
+      <a:bgFillStyleLst>
+        <a:solidFill>
+          <a:schemeClr val="phClr"/>
+        </a:solidFill>
+        <a:solidFill>
+          <a:schemeClr val="phClr">
+            <a:tint val="95000"/>
+            <a:satMod val="170000"/>
+          </a:schemeClr>
+        </a:solidFill>
+        <a:gradFill rotWithShape="1">
+          <a:gsLst>
+            <a:gs pos="0">
+              <a:schemeClr val="phClr">
+                <a:tint val="93000"/>
+                <a:satMod val="150000"/>
+                <a:shade val="98000"/>
+                <a:lumMod val="102000"/>
+              </a:schemeClr>
+            </a:gs>
+            <a:gs pos="50000">
+              <a:schemeClr val="phClr">
+                <a:tint val="98000"/>
+                <a:satMod val="130000"/>
+                <a:shade val="90000"/>
+                <a:lumMod val="103000"/>
+              </a:schemeClr>
+            </a:gs>
+            <a:gs pos="100000">
+              <a:schemeClr val="phClr">
+                <a:shade val="63000"/>
+                <a:satMod val="120000"/>
+              </a:schemeClr>
+            </a:gs>
+          </a:gsLst>
+          <a:lin ang="5400000" scaled="0"/>
+        </a:gradFill>
+      </a:bgFillStyleLst>
+    </a:fmtScheme>
+  </a:themeElements>
+  <a:objectDefaults>
+    <a:lnDef>
+      <a:spPr/>
+      <a:bodyPr/>
+      <a:lstStyle/>
+      <a:style>
+        <a:lnRef idx="2">
+          <a:schemeClr val="accent1"/>
+        </a:lnRef>
+        <a:fillRef idx="0">
+          <a:schemeClr val="accent1"/>
+        </a:fillRef>
+        <a:effectRef idx="1">
+          <a:schemeClr val="accent1"/>
+        </a:effectRef>
+        <a:fontRef idx="minor">
+          <a:schemeClr val="tx1"/>
+        </a:fontRef>
+      </a:style>
+    </a:lnDef>
+  </a:objectDefaults>
+  <a:extraClrSchemeLst/>
+  <a:extLst>
+    <a:ext uri="{05A4C25C-085E-4340-85A3-A5531E510DB2}">
+      <thm15:themeFamily xmlns:thm15="http://schemas.microsoft.com/office/thememl/2012/main" name="Office Theme" id="{2E142A2C-CD16-42D6-873A-C26D2A0506FA}" vid="{1BDDFF52-6CD6-40A5-AB3C-68EB2F1E4D0A}"/>
+    </a:ext>
+  </a:extLst>
+</a:theme>
 </file>